--- a/preview_v7/che/l-che-b1-u3-1.pptx
+++ b/preview_v7/che/l-che-b1-u3-1.pptx
@@ -3111,7 +3111,7 @@
             <a:avLst/>
           </a:prstGeom>
           <a:solidFill>
-            <a:srgbClr val="F4EFE6"/>
+            <a:srgbClr val="1C2A33"/>
           </a:solidFill>
           <a:ln>
             <a:noFill/>
@@ -3142,14 +3142,58 @@
       </p:sp>
       <p:sp>
         <p:nvSpPr>
-          <p:cNvPr id="3" name="TextBox 2"/>
+          <p:cNvPr id="3" name="Rectangle 2"/>
+          <p:cNvSpPr/>
+          <p:nvPr/>
+        </p:nvSpPr>
+        <p:spPr>
+          <a:xfrm>
+            <a:off x="640080" y="960120"/>
+            <a:ext cx="822960" cy="38100"/>
+          </a:xfrm>
+          <a:prstGeom prst="rect">
+            <a:avLst/>
+          </a:prstGeom>
+          <a:solidFill>
+            <a:srgbClr val="C8A86B"/>
+          </a:solidFill>
+          <a:ln>
+            <a:noFill/>
+          </a:ln>
+          <a:effectLst/>
+        </p:spPr>
+        <p:style>
+          <a:lnRef idx="1">
+            <a:schemeClr val="accent1"/>
+          </a:lnRef>
+          <a:fillRef idx="3">
+            <a:schemeClr val="accent1"/>
+          </a:fillRef>
+          <a:effectRef idx="2">
+            <a:schemeClr val="accent1"/>
+          </a:effectRef>
+          <a:fontRef idx="minor">
+            <a:schemeClr val="lt1"/>
+          </a:fontRef>
+        </p:style>
+        <p:txBody>
+          <a:bodyPr rtlCol="0" anchor="ctr"/>
+          <a:lstStyle/>
+          <a:p>
+            <a:pPr algn="ctr"/>
+          </a:p>
+        </p:txBody>
+      </p:sp>
+      <p:sp>
+        <p:nvSpPr>
+          <p:cNvPr id="4" name="TextBox 3"/>
           <p:cNvSpPr txBox="1"/>
           <p:nvPr/>
         </p:nvSpPr>
         <p:spPr>
           <a:xfrm>
-            <a:off x="640080" y="640080"/>
-            <a:ext cx="10911535" cy="502920"/>
+            <a:off x="640080" y="1143000"/>
+            <a:ext cx="10515600" cy="365760"/>
           </a:xfrm>
           <a:prstGeom prst="rect">
             <a:avLst/>
@@ -3162,35 +3206,68 @@
           </a:bodyPr>
           <a:lstStyle/>
           <a:p>
-            <a:pPr algn="l">
-              <a:spcAft>
-                <a:spcPts val="0"/>
-              </a:spcAft>
-            </a:pPr>
-            <a:r>
-              <a:rPr sz="1200" b="1">
-                <a:solidFill>
-                  <a:srgbClr val="B23A2A"/>
+            <a:pPr algn="l"/>
+            <a:r>
+              <a:rPr sz="1500" b="1">
+                <a:solidFill>
+                  <a:srgbClr val="C8A86B"/>
                 </a:solidFill>
                 <a:latin typeface="微软雅黑"/>
                 <a:ea typeface="微软雅黑"/>
                 <a:cs typeface="微软雅黑"/>
               </a:rPr>
-              <a:t>化学 · 必修第一册 · 第3单元 铁 金属材料</a:t>
-            </a:r>
-          </a:p>
-        </p:txBody>
-      </p:sp>
-      <p:sp>
-        <p:nvSpPr>
-          <p:cNvPr id="4" name="Rectangle 3"/>
+              <a:t>必修第一册 · 第3单元 · 铁 金属材料</a:t>
+            </a:r>
+          </a:p>
+        </p:txBody>
+      </p:sp>
+      <p:sp>
+        <p:nvSpPr>
+          <p:cNvPr id="5" name="TextBox 4"/>
+          <p:cNvSpPr txBox="1"/>
+          <p:nvPr/>
+        </p:nvSpPr>
+        <p:spPr>
+          <a:xfrm>
+            <a:off x="640080" y="1874519"/>
+            <a:ext cx="11247120" cy="1280160"/>
+          </a:xfrm>
+          <a:prstGeom prst="rect">
+            <a:avLst/>
+          </a:prstGeom>
+          <a:noFill/>
+        </p:spPr>
+        <p:txBody>
+          <a:bodyPr wrap="square" anchor="t" lIns="0" rIns="0" tIns="0" bIns="0">
+            <a:spAutoFit/>
+          </a:bodyPr>
+          <a:lstStyle/>
+          <a:p>
+            <a:pPr algn="l"/>
+            <a:r>
+              <a:rPr sz="4600" b="1">
+                <a:solidFill>
+                  <a:srgbClr val="FFFFFF"/>
+                </a:solidFill>
+                <a:latin typeface="楷体"/>
+                <a:ea typeface="楷体"/>
+                <a:cs typeface="楷体"/>
+              </a:rPr>
+              <a:t>铁的单质与铁的氧化物</a:t>
+            </a:r>
+          </a:p>
+        </p:txBody>
+      </p:sp>
+      <p:sp>
+        <p:nvSpPr>
+          <p:cNvPr id="6" name="Rectangle 5"/>
           <p:cNvSpPr/>
           <p:nvPr/>
         </p:nvSpPr>
         <p:spPr>
           <a:xfrm>
-            <a:off x="640080" y="1207008"/>
-            <a:ext cx="822960" cy="30480"/>
+            <a:off x="640080" y="3063240"/>
+            <a:ext cx="2011680" cy="30480"/>
           </a:xfrm>
           <a:prstGeom prst="rect">
             <a:avLst/>
@@ -3227,14 +3304,14 @@
       </p:sp>
       <p:sp>
         <p:nvSpPr>
-          <p:cNvPr id="5" name="TextBox 4"/>
+          <p:cNvPr id="7" name="TextBox 6"/>
           <p:cNvSpPr txBox="1"/>
           <p:nvPr/>
         </p:nvSpPr>
         <p:spPr>
           <a:xfrm>
-            <a:off x="640080" y="1737360"/>
-            <a:ext cx="10911535" cy="2011680"/>
+            <a:off x="640080" y="3291840"/>
+            <a:ext cx="10515600" cy="1280160"/>
           </a:xfrm>
           <a:prstGeom prst="rect">
             <a:avLst/>
@@ -3249,101 +3326,37 @@
           <a:p>
             <a:pPr algn="l">
               <a:lnSpc>
-                <a:spcPct val="115000"/>
+                <a:spcPct val="150000"/>
               </a:lnSpc>
+              <a:spcAft>
+                <a:spcPts val="600"/>
+              </a:spcAft>
             </a:pPr>
             <a:r>
-              <a:rPr sz="4000" b="1">
-                <a:solidFill>
-                  <a:srgbClr val="1C2A33"/>
+              <a:rPr sz="1600" b="0">
+                <a:solidFill>
+                  <a:srgbClr val="E7DFD2"/>
                 </a:solidFill>
                 <a:latin typeface="楷体"/>
                 <a:ea typeface="楷体"/>
                 <a:cs typeface="楷体"/>
               </a:rPr>
-              <a:t>铁的单质与铁的氧化物</a:t>
-            </a:r>
-          </a:p>
-        </p:txBody>
-      </p:sp>
-      <p:sp>
-        <p:nvSpPr>
-          <p:cNvPr id="6" name="TextBox 5"/>
-          <p:cNvSpPr txBox="1"/>
-          <p:nvPr/>
-        </p:nvSpPr>
-        <p:spPr>
-          <a:xfrm>
-            <a:off x="640080" y="3840480"/>
-            <a:ext cx="10911535" cy="457200"/>
-          </a:xfrm>
-          <a:prstGeom prst="rect">
-            <a:avLst/>
-          </a:prstGeom>
-          <a:noFill/>
-        </p:spPr>
-        <p:txBody>
-          <a:bodyPr wrap="square" anchor="t" lIns="0" rIns="0" tIns="0" bIns="0">
-            <a:spAutoFit/>
-          </a:bodyPr>
-          <a:lstStyle/>
+              <a:t>铁是应用最广的金属。</a:t>
+            </a:r>
+          </a:p>
           <a:p>
             <a:pPr algn="l"/>
             <a:r>
-              <a:rPr sz="1700" b="1">
-                <a:solidFill>
-                  <a:srgbClr val="B23A2A"/>
+              <a:rPr sz="1300" b="0">
+                <a:solidFill>
+                  <a:srgbClr val="6B6258"/>
                 </a:solidFill>
                 <a:latin typeface="微软雅黑"/>
                 <a:ea typeface="微软雅黑"/>
                 <a:cs typeface="微软雅黑"/>
               </a:rPr>
-              <a:t>新课  ·  第1课时  ·  45分钟</a:t>
-            </a:r>
-          </a:p>
-        </p:txBody>
-      </p:sp>
-      <p:sp>
-        <p:nvSpPr>
-          <p:cNvPr id="7" name="Rectangle 6"/>
-          <p:cNvSpPr/>
-          <p:nvPr/>
-        </p:nvSpPr>
-        <p:spPr>
-          <a:xfrm>
-            <a:off x="640080" y="5394960"/>
-            <a:ext cx="2011680" cy="33020"/>
-          </a:xfrm>
-          <a:prstGeom prst="rect">
-            <a:avLst/>
-          </a:prstGeom>
-          <a:solidFill>
-            <a:srgbClr val="C8A86B"/>
-          </a:solidFill>
-          <a:ln>
-            <a:noFill/>
-          </a:ln>
-          <a:effectLst/>
-        </p:spPr>
-        <p:style>
-          <a:lnRef idx="1">
-            <a:schemeClr val="accent1"/>
-          </a:lnRef>
-          <a:fillRef idx="3">
-            <a:schemeClr val="accent1"/>
-          </a:fillRef>
-          <a:effectRef idx="2">
-            <a:schemeClr val="accent1"/>
-          </a:effectRef>
-          <a:fontRef idx="minor">
-            <a:schemeClr val="lt1"/>
-          </a:fontRef>
-        </p:style>
-        <p:txBody>
-          <a:bodyPr rtlCol="0" anchor="ctr"/>
-          <a:lstStyle/>
-          <a:p>
-            <a:pPr algn="ctr"/>
+              <a:t>学生课堂版 · 化学</a:t>
+            </a:r>
           </a:p>
         </p:txBody>
       </p:sp>
@@ -3355,8 +3368,8 @@
         </p:nvSpPr>
         <p:spPr>
           <a:xfrm>
-            <a:off x="640080" y="5623560"/>
-            <a:ext cx="10911535" cy="548640"/>
+            <a:off x="640080" y="5852160"/>
+            <a:ext cx="10058400" cy="457200"/>
           </a:xfrm>
           <a:prstGeom prst="rect">
             <a:avLst/>
@@ -3371,15 +3384,15 @@
           <a:p>
             <a:pPr algn="l"/>
             <a:r>
-              <a:rPr sz="1400" b="0">
-                <a:solidFill>
-                  <a:srgbClr val="6B6258"/>
+              <a:rPr sz="1300" b="0">
+                <a:solidFill>
+                  <a:srgbClr val="C8A86B"/>
                 </a:solidFill>
                 <a:latin typeface="微软雅黑"/>
                 <a:ea typeface="微软雅黑"/>
                 <a:cs typeface="微软雅黑"/>
               </a:rPr>
-              <a:t>学习任务群：    |    年级：高一</a:t>
+              <a:t>必修第一册 · 第1课时 · 高一</a:t>
             </a:r>
           </a:p>
         </p:txBody>
@@ -3410,7 +3423,7 @@
             <a:r>
               <a:rPr sz="1100" b="0">
                 <a:solidFill>
-                  <a:srgbClr val="6B6258"/>
+                  <a:srgbClr val="FFFFFF"/>
                 </a:solidFill>
                 <a:latin typeface="微软雅黑"/>
                 <a:ea typeface="微软雅黑"/>
@@ -3519,7 +3532,7 @@
                 <a:ea typeface="微软雅黑"/>
                 <a:cs typeface="微软雅黑"/>
               </a:rPr>
-              <a:t>学习目标</a:t>
+              <a:t>本课目标</a:t>
             </a:r>
           </a:p>
         </p:txBody>
@@ -3570,14 +3583,51 @@
       </p:sp>
       <p:sp>
         <p:nvSpPr>
-          <p:cNvPr id="5" name="Rounded Rectangle 4"/>
+          <p:cNvPr id="5" name="TextBox 4"/>
+          <p:cNvSpPr txBox="1"/>
+          <p:nvPr/>
+        </p:nvSpPr>
+        <p:spPr>
+          <a:xfrm>
+            <a:off x="640080" y="1280160"/>
+            <a:ext cx="10058400" cy="548640"/>
+          </a:xfrm>
+          <a:prstGeom prst="rect">
+            <a:avLst/>
+          </a:prstGeom>
+          <a:noFill/>
+        </p:spPr>
+        <p:txBody>
+          <a:bodyPr wrap="square" anchor="t" lIns="0" rIns="0" tIns="0" bIns="0">
+            <a:spAutoFit/>
+          </a:bodyPr>
+          <a:lstStyle/>
+          <a:p>
+            <a:pPr algn="l"/>
+            <a:r>
+              <a:rPr sz="3200" b="1">
+                <a:solidFill>
+                  <a:srgbClr val="1C2A33"/>
+                </a:solidFill>
+                <a:latin typeface="楷体"/>
+                <a:ea typeface="楷体"/>
+                <a:cs typeface="楷体"/>
+              </a:rPr>
+              <a:t>学习目标</a:t>
+            </a:r>
+          </a:p>
+        </p:txBody>
+      </p:sp>
+      <p:sp>
+        <p:nvSpPr>
+          <p:cNvPr id="6" name="Rounded Rectangle 5"/>
           <p:cNvSpPr/>
           <p:nvPr/>
         </p:nvSpPr>
         <p:spPr>
           <a:xfrm>
-            <a:off x="640080" y="1417320"/>
-            <a:ext cx="5349240" cy="2057400"/>
+            <a:off x="640080" y="2057400"/>
+            <a:ext cx="10911535" cy="944118"/>
           </a:xfrm>
           <a:prstGeom prst="roundRect">
             <a:avLst/>
@@ -3585,7 +3635,7 @@
           <a:solidFill>
             <a:srgbClr val="FFFFFF"/>
           </a:solidFill>
-          <a:ln w="22860">
+          <a:ln w="17780">
             <a:solidFill>
               <a:srgbClr val="B23A2A"/>
             </a:solidFill>
@@ -3616,14 +3666,14 @@
       </p:sp>
       <p:sp>
         <p:nvSpPr>
-          <p:cNvPr id="6" name="Oval 5"/>
+          <p:cNvPr id="7" name="Oval 6"/>
           <p:cNvSpPr/>
           <p:nvPr/>
         </p:nvSpPr>
         <p:spPr>
           <a:xfrm>
-            <a:off x="804672" y="1581912"/>
-            <a:ext cx="457200" cy="457200"/>
+            <a:off x="841248" y="2337435"/>
+            <a:ext cx="548640" cy="548640"/>
           </a:xfrm>
           <a:prstGeom prst="ellipse">
             <a:avLst/>
@@ -3660,14 +3710,14 @@
       </p:sp>
       <p:sp>
         <p:nvSpPr>
-          <p:cNvPr id="7" name="TextBox 6"/>
+          <p:cNvPr id="8" name="TextBox 7"/>
           <p:cNvSpPr txBox="1"/>
           <p:nvPr/>
         </p:nvSpPr>
         <p:spPr>
           <a:xfrm>
-            <a:off x="804672" y="1636776"/>
-            <a:ext cx="457200" cy="384048"/>
+            <a:off x="841248" y="2410587"/>
+            <a:ext cx="548640" cy="411480"/>
           </a:xfrm>
           <a:prstGeom prst="rect">
             <a:avLst/>
@@ -3682,7 +3732,7 @@
           <a:p>
             <a:pPr algn="ctr"/>
             <a:r>
-              <a:rPr sz="1600" b="1">
+              <a:rPr sz="2000" b="1">
                 <a:solidFill>
                   <a:srgbClr val="FFFFFF"/>
                 </a:solidFill>
@@ -3697,14 +3747,14 @@
       </p:sp>
       <p:sp>
         <p:nvSpPr>
-          <p:cNvPr id="8" name="TextBox 7"/>
+          <p:cNvPr id="9" name="TextBox 8"/>
           <p:cNvSpPr txBox="1"/>
           <p:nvPr/>
         </p:nvSpPr>
         <p:spPr>
           <a:xfrm>
-            <a:off x="1371600" y="1527048"/>
-            <a:ext cx="4434840" cy="457200"/>
+            <a:off x="1554480" y="2203704"/>
+            <a:ext cx="2377440" cy="834390"/>
           </a:xfrm>
           <a:prstGeom prst="rect">
             <a:avLst/>
@@ -3717,35 +3767,31 @@
           </a:bodyPr>
           <a:lstStyle/>
           <a:p>
-            <a:pPr algn="l">
-              <a:lnSpc>
-                <a:spcPct val="110000"/>
-              </a:lnSpc>
-            </a:pPr>
-            <a:r>
-              <a:rPr sz="1600" b="1">
-                <a:solidFill>
-                  <a:srgbClr val="1C2A33"/>
+            <a:pPr algn="ctr"/>
+            <a:r>
+              <a:rPr sz="1500" b="1">
+                <a:solidFill>
+                  <a:srgbClr val="B23A2A"/>
                 </a:solidFill>
                 <a:latin typeface="微软雅黑"/>
                 <a:ea typeface="微软雅黑"/>
                 <a:cs typeface="微软雅黑"/>
               </a:rPr>
-              <a:t>目标</a:t>
-            </a:r>
-          </a:p>
-        </p:txBody>
-      </p:sp>
-      <p:sp>
-        <p:nvSpPr>
-          <p:cNvPr id="9" name="TextBox 8"/>
+              <a:t>宏观辨识与微观探析</a:t>
+            </a:r>
+          </a:p>
+        </p:txBody>
+      </p:sp>
+      <p:sp>
+        <p:nvSpPr>
+          <p:cNvPr id="10" name="TextBox 9"/>
           <p:cNvSpPr txBox="1"/>
           <p:nvPr/>
         </p:nvSpPr>
         <p:spPr>
           <a:xfrm>
-            <a:off x="1371600" y="1965960"/>
-            <a:ext cx="4434840" cy="1417320"/>
+            <a:off x="4114800" y="2167128"/>
+            <a:ext cx="7253935" cy="889254"/>
           </a:xfrm>
           <a:prstGeom prst="rect">
             <a:avLst/>
@@ -3760,11 +3806,11 @@
           <a:p>
             <a:pPr algn="l">
               <a:lnSpc>
-                <a:spcPct val="128000"/>
+                <a:spcPct val="140000"/>
               </a:lnSpc>
             </a:pPr>
             <a:r>
-              <a:rPr sz="1400" b="0">
+              <a:rPr sz="1350" b="0">
                 <a:solidFill>
                   <a:srgbClr val="1C2A33"/>
                 </a:solidFill>
@@ -3772,21 +3818,21 @@
                 <a:ea typeface="楷体"/>
                 <a:cs typeface="楷体"/>
               </a:rPr>
-              <a:t>宏观辨识与微观探析：描述铁的物理性质及与O2、Cl2、酸、盐的反应。</a:t>
-            </a:r>
-          </a:p>
-        </p:txBody>
-      </p:sp>
-      <p:sp>
-        <p:nvSpPr>
-          <p:cNvPr id="10" name="Rounded Rectangle 9"/>
+              <a:t>描述铁的物理性质及与O2、Cl2、酸、盐的反应。</a:t>
+            </a:r>
+          </a:p>
+        </p:txBody>
+      </p:sp>
+      <p:sp>
+        <p:nvSpPr>
+          <p:cNvPr id="11" name="Rounded Rectangle 10"/>
           <p:cNvSpPr/>
           <p:nvPr/>
         </p:nvSpPr>
         <p:spPr>
           <a:xfrm>
-            <a:off x="6263640" y="1417320"/>
-            <a:ext cx="5349240" cy="2057400"/>
+            <a:off x="640080" y="3166110"/>
+            <a:ext cx="10911535" cy="944118"/>
           </a:xfrm>
           <a:prstGeom prst="roundRect">
             <a:avLst/>
@@ -3794,7 +3840,7 @@
           <a:solidFill>
             <a:srgbClr val="FFFFFF"/>
           </a:solidFill>
-          <a:ln w="22860">
+          <a:ln w="17780">
             <a:solidFill>
               <a:srgbClr val="B23A2A"/>
             </a:solidFill>
@@ -3825,14 +3871,14 @@
       </p:sp>
       <p:sp>
         <p:nvSpPr>
-          <p:cNvPr id="11" name="Oval 10"/>
+          <p:cNvPr id="12" name="Oval 11"/>
           <p:cNvSpPr/>
           <p:nvPr/>
         </p:nvSpPr>
         <p:spPr>
           <a:xfrm>
-            <a:off x="6428232" y="1581912"/>
-            <a:ext cx="457200" cy="457200"/>
+            <a:off x="841248" y="3446145"/>
+            <a:ext cx="548640" cy="548640"/>
           </a:xfrm>
           <a:prstGeom prst="ellipse">
             <a:avLst/>
@@ -3869,14 +3915,14 @@
       </p:sp>
       <p:sp>
         <p:nvSpPr>
-          <p:cNvPr id="12" name="TextBox 11"/>
+          <p:cNvPr id="13" name="TextBox 12"/>
           <p:cNvSpPr txBox="1"/>
           <p:nvPr/>
         </p:nvSpPr>
         <p:spPr>
           <a:xfrm>
-            <a:off x="6428232" y="1636776"/>
-            <a:ext cx="457200" cy="384048"/>
+            <a:off x="841248" y="3519297"/>
+            <a:ext cx="548640" cy="411480"/>
           </a:xfrm>
           <a:prstGeom prst="rect">
             <a:avLst/>
@@ -3891,7 +3937,7 @@
           <a:p>
             <a:pPr algn="ctr"/>
             <a:r>
-              <a:rPr sz="1600" b="1">
+              <a:rPr sz="2000" b="1">
                 <a:solidFill>
                   <a:srgbClr val="FFFFFF"/>
                 </a:solidFill>
@@ -3906,14 +3952,14 @@
       </p:sp>
       <p:sp>
         <p:nvSpPr>
-          <p:cNvPr id="13" name="TextBox 12"/>
+          <p:cNvPr id="14" name="TextBox 13"/>
           <p:cNvSpPr txBox="1"/>
           <p:nvPr/>
         </p:nvSpPr>
         <p:spPr>
           <a:xfrm>
-            <a:off x="6995160" y="1527048"/>
-            <a:ext cx="4434840" cy="457200"/>
+            <a:off x="1554480" y="3312414"/>
+            <a:ext cx="2377440" cy="834390"/>
           </a:xfrm>
           <a:prstGeom prst="rect">
             <a:avLst/>
@@ -3926,35 +3972,31 @@
           </a:bodyPr>
           <a:lstStyle/>
           <a:p>
-            <a:pPr algn="l">
-              <a:lnSpc>
-                <a:spcPct val="110000"/>
-              </a:lnSpc>
-            </a:pPr>
-            <a:r>
-              <a:rPr sz="1600" b="1">
-                <a:solidFill>
-                  <a:srgbClr val="1C2A33"/>
+            <a:pPr algn="ctr"/>
+            <a:r>
+              <a:rPr sz="1500" b="1">
+                <a:solidFill>
+                  <a:srgbClr val="B23A2A"/>
                 </a:solidFill>
                 <a:latin typeface="微软雅黑"/>
                 <a:ea typeface="微软雅黑"/>
                 <a:cs typeface="微软雅黑"/>
               </a:rPr>
-              <a:t>目标</a:t>
-            </a:r>
-          </a:p>
-        </p:txBody>
-      </p:sp>
-      <p:sp>
-        <p:nvSpPr>
-          <p:cNvPr id="14" name="TextBox 13"/>
+              <a:t>变化观念与平衡思想</a:t>
+            </a:r>
+          </a:p>
+        </p:txBody>
+      </p:sp>
+      <p:sp>
+        <p:nvSpPr>
+          <p:cNvPr id="15" name="TextBox 14"/>
           <p:cNvSpPr txBox="1"/>
           <p:nvPr/>
         </p:nvSpPr>
         <p:spPr>
           <a:xfrm>
-            <a:off x="6995160" y="1965960"/>
-            <a:ext cx="4434840" cy="1417320"/>
+            <a:off x="4114800" y="3275838"/>
+            <a:ext cx="7253935" cy="889254"/>
           </a:xfrm>
           <a:prstGeom prst="rect">
             <a:avLst/>
@@ -3969,11 +4011,11 @@
           <a:p>
             <a:pPr algn="l">
               <a:lnSpc>
-                <a:spcPct val="128000"/>
+                <a:spcPct val="140000"/>
               </a:lnSpc>
             </a:pPr>
             <a:r>
-              <a:rPr sz="1400" b="0">
+              <a:rPr sz="1350" b="0">
                 <a:solidFill>
                   <a:srgbClr val="1C2A33"/>
                 </a:solidFill>
@@ -3981,21 +4023,21 @@
                 <a:ea typeface="楷体"/>
                 <a:cs typeface="楷体"/>
               </a:rPr>
-              <a:t>变化观念与平衡思想：认识氧化剂强弱决定Fe被氧化到+2或+3价。</a:t>
-            </a:r>
-          </a:p>
-        </p:txBody>
-      </p:sp>
-      <p:sp>
-        <p:nvSpPr>
-          <p:cNvPr id="15" name="Rounded Rectangle 14"/>
+              <a:t>认识氧化剂强弱决定Fe被氧化到+2或+3价。</a:t>
+            </a:r>
+          </a:p>
+        </p:txBody>
+      </p:sp>
+      <p:sp>
+        <p:nvSpPr>
+          <p:cNvPr id="16" name="Rounded Rectangle 15"/>
           <p:cNvSpPr/>
           <p:nvPr/>
         </p:nvSpPr>
         <p:spPr>
           <a:xfrm>
-            <a:off x="640080" y="3703320"/>
-            <a:ext cx="5349240" cy="2057400"/>
+            <a:off x="640080" y="4274820"/>
+            <a:ext cx="10911535" cy="944118"/>
           </a:xfrm>
           <a:prstGeom prst="roundRect">
             <a:avLst/>
@@ -4003,7 +4045,7 @@
           <a:solidFill>
             <a:srgbClr val="FFFFFF"/>
           </a:solidFill>
-          <a:ln w="22860">
+          <a:ln w="17780">
             <a:solidFill>
               <a:srgbClr val="B23A2A"/>
             </a:solidFill>
@@ -4034,14 +4076,14 @@
       </p:sp>
       <p:sp>
         <p:nvSpPr>
-          <p:cNvPr id="16" name="Oval 15"/>
+          <p:cNvPr id="17" name="Oval 16"/>
           <p:cNvSpPr/>
           <p:nvPr/>
         </p:nvSpPr>
         <p:spPr>
           <a:xfrm>
-            <a:off x="804672" y="3867912"/>
-            <a:ext cx="457200" cy="457200"/>
+            <a:off x="841248" y="4554855"/>
+            <a:ext cx="548640" cy="548640"/>
           </a:xfrm>
           <a:prstGeom prst="ellipse">
             <a:avLst/>
@@ -4078,14 +4120,14 @@
       </p:sp>
       <p:sp>
         <p:nvSpPr>
-          <p:cNvPr id="17" name="TextBox 16"/>
+          <p:cNvPr id="18" name="TextBox 17"/>
           <p:cNvSpPr txBox="1"/>
           <p:nvPr/>
         </p:nvSpPr>
         <p:spPr>
           <a:xfrm>
-            <a:off x="804672" y="3922776"/>
-            <a:ext cx="457200" cy="384048"/>
+            <a:off x="841248" y="4628007"/>
+            <a:ext cx="548640" cy="411480"/>
           </a:xfrm>
           <a:prstGeom prst="rect">
             <a:avLst/>
@@ -4100,7 +4142,7 @@
           <a:p>
             <a:pPr algn="ctr"/>
             <a:r>
-              <a:rPr sz="1600" b="1">
+              <a:rPr sz="2000" b="1">
                 <a:solidFill>
                   <a:srgbClr val="FFFFFF"/>
                 </a:solidFill>
@@ -4115,14 +4157,14 @@
       </p:sp>
       <p:sp>
         <p:nvSpPr>
-          <p:cNvPr id="18" name="TextBox 17"/>
+          <p:cNvPr id="19" name="TextBox 18"/>
           <p:cNvSpPr txBox="1"/>
           <p:nvPr/>
         </p:nvSpPr>
         <p:spPr>
           <a:xfrm>
-            <a:off x="1371600" y="3813048"/>
-            <a:ext cx="4434840" cy="457200"/>
+            <a:off x="1554480" y="4421124"/>
+            <a:ext cx="2377440" cy="834390"/>
           </a:xfrm>
           <a:prstGeom prst="rect">
             <a:avLst/>
@@ -4135,35 +4177,31 @@
           </a:bodyPr>
           <a:lstStyle/>
           <a:p>
-            <a:pPr algn="l">
-              <a:lnSpc>
-                <a:spcPct val="110000"/>
-              </a:lnSpc>
-            </a:pPr>
-            <a:r>
-              <a:rPr sz="1600" b="1">
-                <a:solidFill>
-                  <a:srgbClr val="1C2A33"/>
+            <a:pPr algn="ctr"/>
+            <a:r>
+              <a:rPr sz="1500" b="1">
+                <a:solidFill>
+                  <a:srgbClr val="B23A2A"/>
                 </a:solidFill>
                 <a:latin typeface="微软雅黑"/>
                 <a:ea typeface="微软雅黑"/>
                 <a:cs typeface="微软雅黑"/>
               </a:rPr>
-              <a:t>目标</a:t>
-            </a:r>
-          </a:p>
-        </p:txBody>
-      </p:sp>
-      <p:sp>
-        <p:nvSpPr>
-          <p:cNvPr id="19" name="TextBox 18"/>
+              <a:t>证据推理与模型认知</a:t>
+            </a:r>
+          </a:p>
+        </p:txBody>
+      </p:sp>
+      <p:sp>
+        <p:nvSpPr>
+          <p:cNvPr id="20" name="TextBox 19"/>
           <p:cNvSpPr txBox="1"/>
           <p:nvPr/>
         </p:nvSpPr>
         <p:spPr>
           <a:xfrm>
-            <a:off x="1371600" y="4251960"/>
-            <a:ext cx="4434840" cy="1417320"/>
+            <a:off x="4114800" y="4384548"/>
+            <a:ext cx="7253935" cy="889254"/>
           </a:xfrm>
           <a:prstGeom prst="rect">
             <a:avLst/>
@@ -4178,11 +4216,11 @@
           <a:p>
             <a:pPr algn="l">
               <a:lnSpc>
-                <a:spcPct val="128000"/>
+                <a:spcPct val="140000"/>
               </a:lnSpc>
             </a:pPr>
             <a:r>
-              <a:rPr sz="1400" b="0">
+              <a:rPr sz="1350" b="0">
                 <a:solidFill>
                   <a:srgbClr val="1C2A33"/>
                 </a:solidFill>
@@ -4190,21 +4228,21 @@
                 <a:ea typeface="楷体"/>
                 <a:cs typeface="楷体"/>
               </a:rPr>
-              <a:t>证据推理与模型认知：用价态观点区分FeO、Fe2O3、Fe3O4。</a:t>
-            </a:r>
-          </a:p>
-        </p:txBody>
-      </p:sp>
-      <p:sp>
-        <p:nvSpPr>
-          <p:cNvPr id="20" name="Rounded Rectangle 19"/>
+              <a:t>用价态观点区分FeO、Fe2O3、Fe3O4。</a:t>
+            </a:r>
+          </a:p>
+        </p:txBody>
+      </p:sp>
+      <p:sp>
+        <p:nvSpPr>
+          <p:cNvPr id="21" name="Rounded Rectangle 20"/>
           <p:cNvSpPr/>
           <p:nvPr/>
         </p:nvSpPr>
         <p:spPr>
           <a:xfrm>
-            <a:off x="6263640" y="3703320"/>
-            <a:ext cx="5349240" cy="2057400"/>
+            <a:off x="640080" y="5383530"/>
+            <a:ext cx="10911535" cy="944118"/>
           </a:xfrm>
           <a:prstGeom prst="roundRect">
             <a:avLst/>
@@ -4212,7 +4250,7 @@
           <a:solidFill>
             <a:srgbClr val="FFFFFF"/>
           </a:solidFill>
-          <a:ln w="22860">
+          <a:ln w="17780">
             <a:solidFill>
               <a:srgbClr val="B23A2A"/>
             </a:solidFill>
@@ -4243,14 +4281,14 @@
       </p:sp>
       <p:sp>
         <p:nvSpPr>
-          <p:cNvPr id="21" name="Oval 20"/>
+          <p:cNvPr id="22" name="Oval 21"/>
           <p:cNvSpPr/>
           <p:nvPr/>
         </p:nvSpPr>
         <p:spPr>
           <a:xfrm>
-            <a:off x="6428232" y="3867912"/>
-            <a:ext cx="457200" cy="457200"/>
+            <a:off x="841248" y="5663565"/>
+            <a:ext cx="548640" cy="548640"/>
           </a:xfrm>
           <a:prstGeom prst="ellipse">
             <a:avLst/>
@@ -4287,14 +4325,14 @@
       </p:sp>
       <p:sp>
         <p:nvSpPr>
-          <p:cNvPr id="22" name="TextBox 21"/>
+          <p:cNvPr id="23" name="TextBox 22"/>
           <p:cNvSpPr txBox="1"/>
           <p:nvPr/>
         </p:nvSpPr>
         <p:spPr>
           <a:xfrm>
-            <a:off x="6428232" y="3922776"/>
-            <a:ext cx="457200" cy="384048"/>
+            <a:off x="841248" y="5736717"/>
+            <a:ext cx="548640" cy="411480"/>
           </a:xfrm>
           <a:prstGeom prst="rect">
             <a:avLst/>
@@ -4309,7 +4347,7 @@
           <a:p>
             <a:pPr algn="ctr"/>
             <a:r>
-              <a:rPr sz="1600" b="1">
+              <a:rPr sz="2000" b="1">
                 <a:solidFill>
                   <a:srgbClr val="FFFFFF"/>
                 </a:solidFill>
@@ -4324,14 +4362,14 @@
       </p:sp>
       <p:sp>
         <p:nvSpPr>
-          <p:cNvPr id="23" name="TextBox 22"/>
+          <p:cNvPr id="24" name="TextBox 23"/>
           <p:cNvSpPr txBox="1"/>
           <p:nvPr/>
         </p:nvSpPr>
         <p:spPr>
           <a:xfrm>
-            <a:off x="6995160" y="3813048"/>
-            <a:ext cx="4434840" cy="457200"/>
+            <a:off x="1554480" y="5529834"/>
+            <a:ext cx="2377440" cy="834390"/>
           </a:xfrm>
           <a:prstGeom prst="rect">
             <a:avLst/>
@@ -4344,35 +4382,31 @@
           </a:bodyPr>
           <a:lstStyle/>
           <a:p>
-            <a:pPr algn="l">
-              <a:lnSpc>
-                <a:spcPct val="110000"/>
-              </a:lnSpc>
-            </a:pPr>
-            <a:r>
-              <a:rPr sz="1600" b="1">
-                <a:solidFill>
-                  <a:srgbClr val="1C2A33"/>
+            <a:pPr algn="ctr"/>
+            <a:r>
+              <a:rPr sz="1500" b="1">
+                <a:solidFill>
+                  <a:srgbClr val="B23A2A"/>
                 </a:solidFill>
                 <a:latin typeface="微软雅黑"/>
                 <a:ea typeface="微软雅黑"/>
                 <a:cs typeface="微软雅黑"/>
               </a:rPr>
-              <a:t>目标</a:t>
-            </a:r>
-          </a:p>
-        </p:txBody>
-      </p:sp>
-      <p:sp>
-        <p:nvSpPr>
-          <p:cNvPr id="24" name="TextBox 23"/>
+              <a:t>科学探究与创新意识</a:t>
+            </a:r>
+          </a:p>
+        </p:txBody>
+      </p:sp>
+      <p:sp>
+        <p:nvSpPr>
+          <p:cNvPr id="25" name="TextBox 24"/>
           <p:cNvSpPr txBox="1"/>
           <p:nvPr/>
         </p:nvSpPr>
         <p:spPr>
           <a:xfrm>
-            <a:off x="6995160" y="4251960"/>
-            <a:ext cx="4434840" cy="1417320"/>
+            <a:off x="4114800" y="5493258"/>
+            <a:ext cx="7253935" cy="889254"/>
           </a:xfrm>
           <a:prstGeom prst="rect">
             <a:avLst/>
@@ -4387,11 +4421,11 @@
           <a:p>
             <a:pPr algn="l">
               <a:lnSpc>
-                <a:spcPct val="128000"/>
+                <a:spcPct val="140000"/>
               </a:lnSpc>
             </a:pPr>
             <a:r>
-              <a:rPr sz="1400" b="0">
+              <a:rPr sz="1350" b="0">
                 <a:solidFill>
                   <a:srgbClr val="1C2A33"/>
                 </a:solidFill>
@@ -4399,14 +4433,14 @@
                 <a:ea typeface="楷体"/>
                 <a:cs typeface="楷体"/>
               </a:rPr>
-              <a:t>科学探究与创新意识：通过实验认识铁的化学活性与防护意义。</a:t>
-            </a:r>
-          </a:p>
-        </p:txBody>
-      </p:sp>
-      <p:sp>
-        <p:nvSpPr>
-          <p:cNvPr id="25" name="TextBox 24"/>
+              <a:t>通过实验认识铁的化学活性与防护意义。</a:t>
+            </a:r>
+          </a:p>
+        </p:txBody>
+      </p:sp>
+      <p:sp>
+        <p:nvSpPr>
+          <p:cNvPr id="26" name="TextBox 25"/>
           <p:cNvSpPr txBox="1"/>
           <p:nvPr/>
         </p:nvSpPr>
@@ -4533,13 +4567,13 @@
             <a:r>
               <a:rPr sz="1300" b="1">
                 <a:solidFill>
-                  <a:srgbClr val="2E7D6B"/>
+                  <a:srgbClr val="B23A2A"/>
                 </a:solidFill>
                 <a:latin typeface="微软雅黑"/>
                 <a:ea typeface="微软雅黑"/>
                 <a:cs typeface="微软雅黑"/>
               </a:rPr>
-              <a:t>课文背景</a:t>
+              <a:t>背景 · 权威调研</a:t>
             </a:r>
           </a:p>
         </p:txBody>
@@ -4559,7 +4593,7 @@
             <a:avLst/>
           </a:prstGeom>
           <a:solidFill>
-            <a:srgbClr val="2E7D6B"/>
+            <a:srgbClr val="B23A2A"/>
           </a:solidFill>
           <a:ln>
             <a:noFill/>
@@ -4596,8 +4630,8 @@
         </p:nvSpPr>
         <p:spPr>
           <a:xfrm>
-            <a:off x="640080" y="1508760"/>
-            <a:ext cx="6766560" cy="4572000"/>
+            <a:off x="640080" y="1280160"/>
+            <a:ext cx="10058400" cy="548640"/>
           </a:xfrm>
           <a:prstGeom prst="rect">
             <a:avLst/>
@@ -4610,16 +4644,90 @@
           </a:bodyPr>
           <a:lstStyle/>
           <a:p>
+            <a:pPr algn="l"/>
+            <a:r>
+              <a:rPr sz="2600" b="1">
+                <a:solidFill>
+                  <a:srgbClr val="1C2A33"/>
+                </a:solidFill>
+                <a:latin typeface="楷体"/>
+                <a:ea typeface="楷体"/>
+                <a:cs typeface="楷体"/>
+              </a:rPr>
+              <a:t>教材定位与权威调研</a:t>
+            </a:r>
+          </a:p>
+        </p:txBody>
+      </p:sp>
+      <p:sp>
+        <p:nvSpPr>
+          <p:cNvPr id="6" name="TextBox 5"/>
+          <p:cNvSpPr txBox="1"/>
+          <p:nvPr/>
+        </p:nvSpPr>
+        <p:spPr>
+          <a:xfrm>
+            <a:off x="640080" y="2011680"/>
+            <a:ext cx="5227167" cy="457200"/>
+          </a:xfrm>
+          <a:prstGeom prst="rect">
+            <a:avLst/>
+          </a:prstGeom>
+          <a:noFill/>
+        </p:spPr>
+        <p:txBody>
+          <a:bodyPr wrap="square" anchor="t" lIns="0" rIns="0" tIns="0" bIns="0">
+            <a:spAutoFit/>
+          </a:bodyPr>
+          <a:lstStyle/>
+          <a:p>
+            <a:pPr algn="l"/>
+            <a:r>
+              <a:rPr sz="1700" b="1">
+                <a:solidFill>
+                  <a:srgbClr val="B23A2A"/>
+                </a:solidFill>
+                <a:latin typeface="楷体"/>
+                <a:ea typeface="楷体"/>
+                <a:cs typeface="楷体"/>
+              </a:rPr>
+              <a:t>教材分析</a:t>
+            </a:r>
+          </a:p>
+        </p:txBody>
+      </p:sp>
+      <p:sp>
+        <p:nvSpPr>
+          <p:cNvPr id="7" name="TextBox 6"/>
+          <p:cNvSpPr txBox="1"/>
+          <p:nvPr/>
+        </p:nvSpPr>
+        <p:spPr>
+          <a:xfrm>
+            <a:off x="640080" y="2514599"/>
+            <a:ext cx="5227167" cy="3657600"/>
+          </a:xfrm>
+          <a:prstGeom prst="rect">
+            <a:avLst/>
+          </a:prstGeom>
+          <a:noFill/>
+        </p:spPr>
+        <p:txBody>
+          <a:bodyPr wrap="square" anchor="t" lIns="0" rIns="0" tIns="0" bIns="0">
+            <a:spAutoFit/>
+          </a:bodyPr>
+          <a:lstStyle/>
+          <a:p>
             <a:pPr algn="l">
               <a:lnSpc>
-                <a:spcPct val="150000"/>
+                <a:spcPct val="155000"/>
               </a:lnSpc>
               <a:spcAft>
                 <a:spcPts val="600"/>
               </a:spcAft>
             </a:pPr>
             <a:r>
-              <a:rPr sz="1600" b="0">
+              <a:rPr sz="1400" b="0">
                 <a:solidFill>
                   <a:srgbClr val="1C2A33"/>
                 </a:solidFill>
@@ -4632,41 +4740,57 @@
           </a:p>
         </p:txBody>
       </p:sp>
-      <p:pic>
-        <p:nvPicPr>
-          <p:cNvPr id="6" name="Picture 5" descr="craft.jpg"/>
-          <p:cNvPicPr>
-            <a:picLocks noChangeAspect="1"/>
-          </p:cNvPicPr>
-          <p:nvPr/>
-        </p:nvPicPr>
-        <p:blipFill>
-          <a:blip r:embed="rId2"/>
-          <a:srcRect l="368" r="368"/>
-          <a:stretch>
-            <a:fillRect/>
-          </a:stretch>
-        </p:blipFill>
-        <p:spPr>
-          <a:xfrm>
-            <a:off x="8046720" y="1508760"/>
-            <a:ext cx="4114800" cy="3108960"/>
-          </a:xfrm>
-          <a:prstGeom prst="rect">
-            <a:avLst/>
-          </a:prstGeom>
-        </p:spPr>
-      </p:pic>
-      <p:sp>
-        <p:nvSpPr>
-          <p:cNvPr id="7" name="TextBox 6"/>
+      <p:sp>
+        <p:nvSpPr>
+          <p:cNvPr id="8" name="Rounded Rectangle 7"/>
+          <p:cNvSpPr/>
+          <p:nvPr/>
+        </p:nvSpPr>
+        <p:spPr>
+          <a:xfrm>
+            <a:off x="6324447" y="2011680"/>
+            <a:ext cx="5227167" cy="3931920"/>
+          </a:xfrm>
+          <a:prstGeom prst="roundRect">
+            <a:avLst/>
+          </a:prstGeom>
+          <a:solidFill>
+            <a:srgbClr val="1C2A33"/>
+          </a:solidFill>
+          <a:effectLst/>
+        </p:spPr>
+        <p:style>
+          <a:lnRef idx="1">
+            <a:schemeClr val="accent1"/>
+          </a:lnRef>
+          <a:fillRef idx="3">
+            <a:schemeClr val="accent1"/>
+          </a:fillRef>
+          <a:effectRef idx="2">
+            <a:schemeClr val="accent1"/>
+          </a:effectRef>
+          <a:fontRef idx="minor">
+            <a:schemeClr val="lt1"/>
+          </a:fontRef>
+        </p:style>
+        <p:txBody>
+          <a:bodyPr rtlCol="0" anchor="ctr"/>
+          <a:lstStyle/>
+          <a:p>
+            <a:pPr algn="ctr"/>
+          </a:p>
+        </p:txBody>
+      </p:sp>
+      <p:sp>
+        <p:nvSpPr>
+          <p:cNvPr id="9" name="TextBox 8"/>
           <p:cNvSpPr txBox="1"/>
           <p:nvPr/>
         </p:nvSpPr>
         <p:spPr>
           <a:xfrm>
-            <a:off x="8046720" y="4663440"/>
-            <a:ext cx="4114800" cy="365760"/>
+            <a:off x="6598767" y="2148840"/>
+            <a:ext cx="4678527" cy="457200"/>
           </a:xfrm>
           <a:prstGeom prst="rect">
             <a:avLst/>
@@ -4679,24 +4803,126 @@
           </a:bodyPr>
           <a:lstStyle/>
           <a:p>
-            <a:pPr algn="ctr"/>
-            <a:r>
-              <a:rPr sz="1100" b="0">
-                <a:solidFill>
-                  <a:srgbClr val="6B6258"/>
+            <a:pPr algn="l"/>
+            <a:r>
+              <a:rPr sz="1500" b="1">
+                <a:solidFill>
+                  <a:srgbClr val="C8A86B"/>
+                </a:solidFill>
+                <a:latin typeface="楷体"/>
+                <a:ea typeface="楷体"/>
+                <a:cs typeface="楷体"/>
+              </a:rPr>
+              <a:t>权威来源（联网核实）</a:t>
+            </a:r>
+          </a:p>
+        </p:txBody>
+      </p:sp>
+      <p:sp>
+        <p:nvSpPr>
+          <p:cNvPr id="10" name="TextBox 9"/>
+          <p:cNvSpPr txBox="1"/>
+          <p:nvPr/>
+        </p:nvSpPr>
+        <p:spPr>
+          <a:xfrm>
+            <a:off x="6598767" y="2697480"/>
+            <a:ext cx="4678527" cy="3017520"/>
+          </a:xfrm>
+          <a:prstGeom prst="rect">
+            <a:avLst/>
+          </a:prstGeom>
+          <a:noFill/>
+        </p:spPr>
+        <p:txBody>
+          <a:bodyPr wrap="square" anchor="t" lIns="0" rIns="0" tIns="0" bIns="0">
+            <a:spAutoFit/>
+          </a:bodyPr>
+          <a:lstStyle/>
+          <a:p>
+            <a:pPr algn="l">
+              <a:lnSpc>
+                <a:spcPct val="145000"/>
+              </a:lnSpc>
+              <a:spcAft>
+                <a:spcPts val="800"/>
+              </a:spcAft>
+            </a:pPr>
+            <a:r>
+              <a:rPr sz="1250" b="0">
+                <a:solidFill>
+                  <a:srgbClr val="FFFFFF"/>
                 </a:solidFill>
                 <a:latin typeface="微软雅黑"/>
                 <a:ea typeface="微软雅黑"/>
                 <a:cs typeface="微软雅黑"/>
               </a:rPr>
-              <a:t>资料图（自由授权，复用 craft.jpg）</a:t>
-            </a:r>
-          </a:p>
-        </p:txBody>
-      </p:sp>
-      <p:sp>
-        <p:nvSpPr>
-          <p:cNvPr id="8" name="TextBox 7"/>
+              <a:t>· 百度百科《铁》：2Fe+3Cl2=2FeCl3；3Fe+2O2=Fe3O4。</a:t>
+            </a:r>
+          </a:p>
+          <a:p>
+            <a:pPr algn="l">
+              <a:lnSpc>
+                <a:spcPct val="145000"/>
+              </a:lnSpc>
+              <a:spcAft>
+                <a:spcPts val="800"/>
+              </a:spcAft>
+            </a:pPr>
+            <a:r>
+              <a:rPr sz="1250" b="0">
+                <a:solidFill>
+                  <a:srgbClr val="FFFFFF"/>
+                </a:solidFill>
+                <a:latin typeface="微软雅黑"/>
+                <a:ea typeface="微软雅黑"/>
+                <a:cs typeface="微软雅黑"/>
+              </a:rPr>
+              <a:t>· 高中化学考点：与 Cl2 得 +3、与 S/H+ 得 +2。</a:t>
+            </a:r>
+          </a:p>
+        </p:txBody>
+      </p:sp>
+      <p:sp>
+        <p:nvSpPr>
+          <p:cNvPr id="11" name="TextBox 10"/>
+          <p:cNvSpPr txBox="1"/>
+          <p:nvPr/>
+        </p:nvSpPr>
+        <p:spPr>
+          <a:xfrm>
+            <a:off x="6324447" y="6035040"/>
+            <a:ext cx="5227167" cy="365760"/>
+          </a:xfrm>
+          <a:prstGeom prst="rect">
+            <a:avLst/>
+          </a:prstGeom>
+          <a:noFill/>
+        </p:spPr>
+        <p:txBody>
+          <a:bodyPr wrap="square" anchor="t" lIns="0" rIns="0" tIns="0" bIns="0">
+            <a:spAutoFit/>
+          </a:bodyPr>
+          <a:lstStyle/>
+          <a:p>
+            <a:pPr algn="ctr"/>
+            <a:r>
+              <a:rPr sz="1100" b="0">
+                <a:solidFill>
+                  <a:srgbClr val="6B6258"/>
+                </a:solidFill>
+                <a:latin typeface="微软雅黑"/>
+                <a:ea typeface="微软雅黑"/>
+                <a:cs typeface="微软雅黑"/>
+              </a:rPr>
+              <a:t>本课件未使用无关配图（学科色块呈现）</a:t>
+            </a:r>
+          </a:p>
+        </p:txBody>
+      </p:sp>
+      <p:sp>
+        <p:nvSpPr>
+          <p:cNvPr id="12" name="TextBox 11"/>
           <p:cNvSpPr txBox="1"/>
           <p:nvPr/>
         </p:nvSpPr>
@@ -4829,7 +5055,7 @@
                 <a:ea typeface="微软雅黑"/>
                 <a:cs typeface="微软雅黑"/>
               </a:rPr>
-              <a:t>学习重点</a:t>
+              <a:t>重点</a:t>
             </a:r>
           </a:p>
         </p:txBody>
@@ -4880,14 +5106,393 @@
       </p:sp>
       <p:sp>
         <p:nvSpPr>
-          <p:cNvPr id="5" name="Rounded Rectangle 4"/>
+          <p:cNvPr id="5" name="TextBox 4"/>
+          <p:cNvSpPr txBox="1"/>
+          <p:nvPr/>
+        </p:nvSpPr>
+        <p:spPr>
+          <a:xfrm>
+            <a:off x="640080" y="1280160"/>
+            <a:ext cx="10058400" cy="548640"/>
+          </a:xfrm>
+          <a:prstGeom prst="rect">
+            <a:avLst/>
+          </a:prstGeom>
+          <a:noFill/>
+        </p:spPr>
+        <p:txBody>
+          <a:bodyPr wrap="square" anchor="t" lIns="0" rIns="0" tIns="0" bIns="0">
+            <a:spAutoFit/>
+          </a:bodyPr>
+          <a:lstStyle/>
+          <a:p>
+            <a:pPr algn="l"/>
+            <a:r>
+              <a:rPr sz="2800" b="1">
+                <a:solidFill>
+                  <a:srgbClr val="1C2A33"/>
+                </a:solidFill>
+                <a:latin typeface="楷体"/>
+                <a:ea typeface="楷体"/>
+                <a:cs typeface="楷体"/>
+              </a:rPr>
+              <a:t>本课重点</a:t>
+            </a:r>
+          </a:p>
+        </p:txBody>
+      </p:sp>
+      <p:sp>
+        <p:nvSpPr>
+          <p:cNvPr id="6" name="Rounded Rectangle 5"/>
           <p:cNvSpPr/>
           <p:nvPr/>
         </p:nvSpPr>
         <p:spPr>
           <a:xfrm>
-            <a:off x="640080" y="1371600"/>
-            <a:ext cx="10911535" cy="1170432"/>
+            <a:off x="640080" y="2103120"/>
+            <a:ext cx="2453563" cy="4023360"/>
+          </a:xfrm>
+          <a:prstGeom prst="roundRect">
+            <a:avLst/>
+          </a:prstGeom>
+          <a:solidFill>
+            <a:srgbClr val="FFFFFF"/>
+          </a:solidFill>
+          <a:ln w="22860">
+            <a:solidFill>
+              <a:srgbClr val="B23A2A"/>
+            </a:solidFill>
+          </a:ln>
+          <a:effectLst/>
+        </p:spPr>
+        <p:style>
+          <a:lnRef idx="1">
+            <a:schemeClr val="accent1"/>
+          </a:lnRef>
+          <a:fillRef idx="3">
+            <a:schemeClr val="accent1"/>
+          </a:fillRef>
+          <a:effectRef idx="2">
+            <a:schemeClr val="accent1"/>
+          </a:effectRef>
+          <a:fontRef idx="minor">
+            <a:schemeClr val="lt1"/>
+          </a:fontRef>
+        </p:style>
+        <p:txBody>
+          <a:bodyPr rtlCol="0" anchor="ctr"/>
+          <a:lstStyle/>
+          <a:p>
+            <a:pPr algn="ctr"/>
+          </a:p>
+        </p:txBody>
+      </p:sp>
+      <p:sp>
+        <p:nvSpPr>
+          <p:cNvPr id="7" name="Rectangle 6"/>
+          <p:cNvSpPr/>
+          <p:nvPr/>
+        </p:nvSpPr>
+        <p:spPr>
+          <a:xfrm>
+            <a:off x="640080" y="2103120"/>
+            <a:ext cx="2453563" cy="502920"/>
+          </a:xfrm>
+          <a:prstGeom prst="rect">
+            <a:avLst/>
+          </a:prstGeom>
+          <a:solidFill>
+            <a:srgbClr val="B23A2A"/>
+          </a:solidFill>
+          <a:ln>
+            <a:noFill/>
+          </a:ln>
+          <a:effectLst/>
+        </p:spPr>
+        <p:style>
+          <a:lnRef idx="1">
+            <a:schemeClr val="accent1"/>
+          </a:lnRef>
+          <a:fillRef idx="3">
+            <a:schemeClr val="accent1"/>
+          </a:fillRef>
+          <a:effectRef idx="2">
+            <a:schemeClr val="accent1"/>
+          </a:effectRef>
+          <a:fontRef idx="minor">
+            <a:schemeClr val="lt1"/>
+          </a:fontRef>
+        </p:style>
+        <p:txBody>
+          <a:bodyPr rtlCol="0" anchor="ctr"/>
+          <a:lstStyle/>
+          <a:p>
+            <a:pPr algn="ctr"/>
+          </a:p>
+        </p:txBody>
+      </p:sp>
+      <p:sp>
+        <p:nvSpPr>
+          <p:cNvPr id="8" name="TextBox 7"/>
+          <p:cNvSpPr txBox="1"/>
+          <p:nvPr/>
+        </p:nvSpPr>
+        <p:spPr>
+          <a:xfrm>
+            <a:off x="640080" y="2194560"/>
+            <a:ext cx="2453563" cy="365760"/>
+          </a:xfrm>
+          <a:prstGeom prst="rect">
+            <a:avLst/>
+          </a:prstGeom>
+          <a:noFill/>
+        </p:spPr>
+        <p:txBody>
+          <a:bodyPr wrap="square" anchor="t" lIns="0" rIns="0" tIns="0" bIns="0">
+            <a:spAutoFit/>
+          </a:bodyPr>
+          <a:lstStyle/>
+          <a:p>
+            <a:pPr algn="ctr"/>
+            <a:r>
+              <a:rPr sz="1500" b="1">
+                <a:solidFill>
+                  <a:srgbClr val="FFFFFF"/>
+                </a:solidFill>
+                <a:latin typeface="微软雅黑"/>
+                <a:ea typeface="微软雅黑"/>
+                <a:cs typeface="微软雅黑"/>
+              </a:rPr>
+              <a:t>重点 1</a:t>
+            </a:r>
+          </a:p>
+        </p:txBody>
+      </p:sp>
+      <p:sp>
+        <p:nvSpPr>
+          <p:cNvPr id="9" name="TextBox 8"/>
+          <p:cNvSpPr txBox="1"/>
+          <p:nvPr/>
+        </p:nvSpPr>
+        <p:spPr>
+          <a:xfrm>
+            <a:off x="868680" y="2788920"/>
+            <a:ext cx="1996363" cy="3200400"/>
+          </a:xfrm>
+          <a:prstGeom prst="rect">
+            <a:avLst/>
+          </a:prstGeom>
+          <a:noFill/>
+        </p:spPr>
+        <p:txBody>
+          <a:bodyPr wrap="square" anchor="t" lIns="0" rIns="0" tIns="0" bIns="0">
+            <a:spAutoFit/>
+          </a:bodyPr>
+          <a:lstStyle/>
+          <a:p>
+            <a:pPr algn="l">
+              <a:lnSpc>
+                <a:spcPct val="150000"/>
+              </a:lnSpc>
+              <a:spcAft>
+                <a:spcPts val="600"/>
+              </a:spcAft>
+            </a:pPr>
+            <a:r>
+              <a:rPr sz="1350" b="0">
+                <a:solidFill>
+                  <a:srgbClr val="1C2A33"/>
+                </a:solidFill>
+                <a:latin typeface="楷体"/>
+                <a:ea typeface="楷体"/>
+                <a:cs typeface="楷体"/>
+              </a:rPr>
+              <a:t>① Fe物性：银白、良导、延展。</a:t>
+            </a:r>
+          </a:p>
+        </p:txBody>
+      </p:sp>
+      <p:sp>
+        <p:nvSpPr>
+          <p:cNvPr id="10" name="Rounded Rectangle 9"/>
+          <p:cNvSpPr/>
+          <p:nvPr/>
+        </p:nvSpPr>
+        <p:spPr>
+          <a:xfrm>
+            <a:off x="3459403" y="2103120"/>
+            <a:ext cx="2453563" cy="4023360"/>
+          </a:xfrm>
+          <a:prstGeom prst="roundRect">
+            <a:avLst/>
+          </a:prstGeom>
+          <a:solidFill>
+            <a:srgbClr val="FFFFFF"/>
+          </a:solidFill>
+          <a:ln w="22860">
+            <a:solidFill>
+              <a:srgbClr val="2E7D6B"/>
+            </a:solidFill>
+          </a:ln>
+          <a:effectLst/>
+        </p:spPr>
+        <p:style>
+          <a:lnRef idx="1">
+            <a:schemeClr val="accent1"/>
+          </a:lnRef>
+          <a:fillRef idx="3">
+            <a:schemeClr val="accent1"/>
+          </a:fillRef>
+          <a:effectRef idx="2">
+            <a:schemeClr val="accent1"/>
+          </a:effectRef>
+          <a:fontRef idx="minor">
+            <a:schemeClr val="lt1"/>
+          </a:fontRef>
+        </p:style>
+        <p:txBody>
+          <a:bodyPr rtlCol="0" anchor="ctr"/>
+          <a:lstStyle/>
+          <a:p>
+            <a:pPr algn="ctr"/>
+          </a:p>
+        </p:txBody>
+      </p:sp>
+      <p:sp>
+        <p:nvSpPr>
+          <p:cNvPr id="11" name="Rectangle 10"/>
+          <p:cNvSpPr/>
+          <p:nvPr/>
+        </p:nvSpPr>
+        <p:spPr>
+          <a:xfrm>
+            <a:off x="3459403" y="2103120"/>
+            <a:ext cx="2453563" cy="502920"/>
+          </a:xfrm>
+          <a:prstGeom prst="rect">
+            <a:avLst/>
+          </a:prstGeom>
+          <a:solidFill>
+            <a:srgbClr val="2E7D6B"/>
+          </a:solidFill>
+          <a:ln>
+            <a:noFill/>
+          </a:ln>
+          <a:effectLst/>
+        </p:spPr>
+        <p:style>
+          <a:lnRef idx="1">
+            <a:schemeClr val="accent1"/>
+          </a:lnRef>
+          <a:fillRef idx="3">
+            <a:schemeClr val="accent1"/>
+          </a:fillRef>
+          <a:effectRef idx="2">
+            <a:schemeClr val="accent1"/>
+          </a:effectRef>
+          <a:fontRef idx="minor">
+            <a:schemeClr val="lt1"/>
+          </a:fontRef>
+        </p:style>
+        <p:txBody>
+          <a:bodyPr rtlCol="0" anchor="ctr"/>
+          <a:lstStyle/>
+          <a:p>
+            <a:pPr algn="ctr"/>
+          </a:p>
+        </p:txBody>
+      </p:sp>
+      <p:sp>
+        <p:nvSpPr>
+          <p:cNvPr id="12" name="TextBox 11"/>
+          <p:cNvSpPr txBox="1"/>
+          <p:nvPr/>
+        </p:nvSpPr>
+        <p:spPr>
+          <a:xfrm>
+            <a:off x="3459403" y="2194560"/>
+            <a:ext cx="2453563" cy="365760"/>
+          </a:xfrm>
+          <a:prstGeom prst="rect">
+            <a:avLst/>
+          </a:prstGeom>
+          <a:noFill/>
+        </p:spPr>
+        <p:txBody>
+          <a:bodyPr wrap="square" anchor="t" lIns="0" rIns="0" tIns="0" bIns="0">
+            <a:spAutoFit/>
+          </a:bodyPr>
+          <a:lstStyle/>
+          <a:p>
+            <a:pPr algn="ctr"/>
+            <a:r>
+              <a:rPr sz="1500" b="1">
+                <a:solidFill>
+                  <a:srgbClr val="FFFFFF"/>
+                </a:solidFill>
+                <a:latin typeface="微软雅黑"/>
+                <a:ea typeface="微软雅黑"/>
+                <a:cs typeface="微软雅黑"/>
+              </a:rPr>
+              <a:t>重点 2</a:t>
+            </a:r>
+          </a:p>
+        </p:txBody>
+      </p:sp>
+      <p:sp>
+        <p:nvSpPr>
+          <p:cNvPr id="13" name="TextBox 12"/>
+          <p:cNvSpPr txBox="1"/>
+          <p:nvPr/>
+        </p:nvSpPr>
+        <p:spPr>
+          <a:xfrm>
+            <a:off x="3688003" y="2788920"/>
+            <a:ext cx="1996363" cy="3200400"/>
+          </a:xfrm>
+          <a:prstGeom prst="rect">
+            <a:avLst/>
+          </a:prstGeom>
+          <a:noFill/>
+        </p:spPr>
+        <p:txBody>
+          <a:bodyPr wrap="square" anchor="t" lIns="0" rIns="0" tIns="0" bIns="0">
+            <a:spAutoFit/>
+          </a:bodyPr>
+          <a:lstStyle/>
+          <a:p>
+            <a:pPr algn="l">
+              <a:lnSpc>
+                <a:spcPct val="150000"/>
+              </a:lnSpc>
+              <a:spcAft>
+                <a:spcPts val="600"/>
+              </a:spcAft>
+            </a:pPr>
+            <a:r>
+              <a:rPr sz="1350" b="0">
+                <a:solidFill>
+                  <a:srgbClr val="1C2A33"/>
+                </a:solidFill>
+                <a:latin typeface="楷体"/>
+                <a:ea typeface="楷体"/>
+                <a:cs typeface="楷体"/>
+              </a:rPr>
+              <a:t>② 与O2：3Fe+2O2=Fe3O4(黑,有磁性)；常温潮湿生锈(Fe2O3·xH2O)。</a:t>
+            </a:r>
+          </a:p>
+        </p:txBody>
+      </p:sp>
+      <p:sp>
+        <p:nvSpPr>
+          <p:cNvPr id="14" name="Rounded Rectangle 13"/>
+          <p:cNvSpPr/>
+          <p:nvPr/>
+        </p:nvSpPr>
+        <p:spPr>
+          <a:xfrm>
+            <a:off x="6278727" y="2103120"/>
+            <a:ext cx="2453563" cy="4023360"/>
           </a:xfrm>
           <a:prstGeom prst="roundRect">
             <a:avLst/>
@@ -4926,14 +5531,58 @@
       </p:sp>
       <p:sp>
         <p:nvSpPr>
-          <p:cNvPr id="6" name="TextBox 5"/>
+          <p:cNvPr id="15" name="Rectangle 14"/>
+          <p:cNvSpPr/>
+          <p:nvPr/>
+        </p:nvSpPr>
+        <p:spPr>
+          <a:xfrm>
+            <a:off x="6278727" y="2103120"/>
+            <a:ext cx="2453563" cy="502920"/>
+          </a:xfrm>
+          <a:prstGeom prst="rect">
+            <a:avLst/>
+          </a:prstGeom>
+          <a:solidFill>
+            <a:srgbClr val="C8A86B"/>
+          </a:solidFill>
+          <a:ln>
+            <a:noFill/>
+          </a:ln>
+          <a:effectLst/>
+        </p:spPr>
+        <p:style>
+          <a:lnRef idx="1">
+            <a:schemeClr val="accent1"/>
+          </a:lnRef>
+          <a:fillRef idx="3">
+            <a:schemeClr val="accent1"/>
+          </a:fillRef>
+          <a:effectRef idx="2">
+            <a:schemeClr val="accent1"/>
+          </a:effectRef>
+          <a:fontRef idx="minor">
+            <a:schemeClr val="lt1"/>
+          </a:fontRef>
+        </p:style>
+        <p:txBody>
+          <a:bodyPr rtlCol="0" anchor="ctr"/>
+          <a:lstStyle/>
+          <a:p>
+            <a:pPr algn="ctr"/>
+          </a:p>
+        </p:txBody>
+      </p:sp>
+      <p:sp>
+        <p:nvSpPr>
+          <p:cNvPr id="16" name="TextBox 15"/>
           <p:cNvSpPr txBox="1"/>
           <p:nvPr/>
         </p:nvSpPr>
         <p:spPr>
           <a:xfrm>
-            <a:off x="1371600" y="1481328"/>
-            <a:ext cx="9997135" cy="457200"/>
+            <a:off x="6278727" y="2194560"/>
+            <a:ext cx="2453563" cy="365760"/>
           </a:xfrm>
           <a:prstGeom prst="rect">
             <a:avLst/>
@@ -4946,35 +5595,31 @@
           </a:bodyPr>
           <a:lstStyle/>
           <a:p>
-            <a:pPr algn="l">
-              <a:lnSpc>
-                <a:spcPct val="110000"/>
-              </a:lnSpc>
-            </a:pPr>
-            <a:r>
-              <a:rPr sz="1600" b="1">
-                <a:solidFill>
-                  <a:srgbClr val="1C2A33"/>
+            <a:pPr algn="ctr"/>
+            <a:r>
+              <a:rPr sz="1500" b="1">
+                <a:solidFill>
+                  <a:srgbClr val="FFFFFF"/>
                 </a:solidFill>
                 <a:latin typeface="微软雅黑"/>
                 <a:ea typeface="微软雅黑"/>
                 <a:cs typeface="微软雅黑"/>
               </a:rPr>
-              <a:t/>
-            </a:r>
-          </a:p>
-        </p:txBody>
-      </p:sp>
-      <p:sp>
-        <p:nvSpPr>
-          <p:cNvPr id="7" name="TextBox 6"/>
+              <a:t>重点 3</a:t>
+            </a:r>
+          </a:p>
+        </p:txBody>
+      </p:sp>
+      <p:sp>
+        <p:nvSpPr>
+          <p:cNvPr id="17" name="TextBox 16"/>
           <p:cNvSpPr txBox="1"/>
           <p:nvPr/>
         </p:nvSpPr>
         <p:spPr>
           <a:xfrm>
-            <a:off x="1371600" y="1920240"/>
-            <a:ext cx="9997135" cy="530352"/>
+            <a:off x="6507327" y="2788920"/>
+            <a:ext cx="1996363" cy="3200400"/>
           </a:xfrm>
           <a:prstGeom prst="rect">
             <a:avLst/>
@@ -4989,11 +5634,14 @@
           <a:p>
             <a:pPr algn="l">
               <a:lnSpc>
-                <a:spcPct val="128000"/>
+                <a:spcPct val="150000"/>
               </a:lnSpc>
+              <a:spcAft>
+                <a:spcPts val="600"/>
+              </a:spcAft>
             </a:pPr>
             <a:r>
-              <a:rPr sz="1300" b="0">
+              <a:rPr sz="1350" b="0">
                 <a:solidFill>
                   <a:srgbClr val="1C2A33"/>
                 </a:solidFill>
@@ -5001,21 +5649,21 @@
                 <a:ea typeface="楷体"/>
                 <a:cs typeface="楷体"/>
               </a:rPr>
-              <a:t>① Fe物性：银白、良导、延展。</a:t>
-            </a:r>
-          </a:p>
-        </p:txBody>
-      </p:sp>
-      <p:sp>
-        <p:nvSpPr>
-          <p:cNvPr id="8" name="Rounded Rectangle 7"/>
+              <a:t>③ 与强氧化剂：2Fe+3Cl2=2FeCl3；与弱氧化剂：Fe+S=FeS(Fe+2)。</a:t>
+            </a:r>
+          </a:p>
+        </p:txBody>
+      </p:sp>
+      <p:sp>
+        <p:nvSpPr>
+          <p:cNvPr id="18" name="Rounded Rectangle 17"/>
           <p:cNvSpPr/>
           <p:nvPr/>
         </p:nvSpPr>
         <p:spPr>
           <a:xfrm>
-            <a:off x="640080" y="2651760"/>
-            <a:ext cx="10911535" cy="1170432"/>
+            <a:off x="9098051" y="2103120"/>
+            <a:ext cx="2453563" cy="4023360"/>
           </a:xfrm>
           <a:prstGeom prst="roundRect">
             <a:avLst/>
@@ -5025,7 +5673,7 @@
           </a:solidFill>
           <a:ln w="22860">
             <a:solidFill>
-              <a:srgbClr val="C8A86B"/>
+              <a:srgbClr val="6B6258"/>
             </a:solidFill>
           </a:ln>
           <a:effectLst/>
@@ -5054,107 +5702,23 @@
       </p:sp>
       <p:sp>
         <p:nvSpPr>
-          <p:cNvPr id="9" name="TextBox 8"/>
-          <p:cNvSpPr txBox="1"/>
-          <p:nvPr/>
-        </p:nvSpPr>
-        <p:spPr>
-          <a:xfrm>
-            <a:off x="1371600" y="2761488"/>
-            <a:ext cx="9997135" cy="457200"/>
-          </a:xfrm>
-          <a:prstGeom prst="rect">
-            <a:avLst/>
-          </a:prstGeom>
-          <a:noFill/>
-        </p:spPr>
-        <p:txBody>
-          <a:bodyPr wrap="square" anchor="t" lIns="0" rIns="0" tIns="0" bIns="0">
-            <a:spAutoFit/>
-          </a:bodyPr>
-          <a:lstStyle/>
-          <a:p>
-            <a:pPr algn="l">
-              <a:lnSpc>
-                <a:spcPct val="110000"/>
-              </a:lnSpc>
-            </a:pPr>
-            <a:r>
-              <a:rPr sz="1600" b="1">
-                <a:solidFill>
-                  <a:srgbClr val="1C2A33"/>
-                </a:solidFill>
-                <a:latin typeface="微软雅黑"/>
-                <a:ea typeface="微软雅黑"/>
-                <a:cs typeface="微软雅黑"/>
-              </a:rPr>
-              <a:t/>
-            </a:r>
-          </a:p>
-        </p:txBody>
-      </p:sp>
-      <p:sp>
-        <p:nvSpPr>
-          <p:cNvPr id="10" name="TextBox 9"/>
-          <p:cNvSpPr txBox="1"/>
-          <p:nvPr/>
-        </p:nvSpPr>
-        <p:spPr>
-          <a:xfrm>
-            <a:off x="1371600" y="3200400"/>
-            <a:ext cx="9997135" cy="530352"/>
-          </a:xfrm>
-          <a:prstGeom prst="rect">
-            <a:avLst/>
-          </a:prstGeom>
-          <a:noFill/>
-        </p:spPr>
-        <p:txBody>
-          <a:bodyPr wrap="square" anchor="t" lIns="0" rIns="0" tIns="0" bIns="0">
-            <a:spAutoFit/>
-          </a:bodyPr>
-          <a:lstStyle/>
-          <a:p>
-            <a:pPr algn="l">
-              <a:lnSpc>
-                <a:spcPct val="128000"/>
-              </a:lnSpc>
-            </a:pPr>
-            <a:r>
-              <a:rPr sz="1200" b="0">
-                <a:solidFill>
-                  <a:srgbClr val="1C2A33"/>
-                </a:solidFill>
-                <a:latin typeface="楷体"/>
-                <a:ea typeface="楷体"/>
-                <a:cs typeface="楷体"/>
-              </a:rPr>
-              <a:t>② 与O2：3Fe+2O2=Fe3O4(黑,有磁性)；常温潮湿生锈(Fe2O3·xH2O)。</a:t>
-            </a:r>
-          </a:p>
-        </p:txBody>
-      </p:sp>
-      <p:sp>
-        <p:nvSpPr>
-          <p:cNvPr id="11" name="Rounded Rectangle 10"/>
+          <p:cNvPr id="19" name="Rectangle 18"/>
           <p:cNvSpPr/>
           <p:nvPr/>
         </p:nvSpPr>
         <p:spPr>
           <a:xfrm>
-            <a:off x="640080" y="3931920"/>
-            <a:ext cx="10911535" cy="1170432"/>
-          </a:xfrm>
-          <a:prstGeom prst="roundRect">
+            <a:off x="9098051" y="2103120"/>
+            <a:ext cx="2453563" cy="502920"/>
+          </a:xfrm>
+          <a:prstGeom prst="rect">
             <a:avLst/>
           </a:prstGeom>
           <a:solidFill>
-            <a:srgbClr val="FFFFFF"/>
+            <a:srgbClr val="6B6258"/>
           </a:solidFill>
-          <a:ln w="22860">
-            <a:solidFill>
-              <a:srgbClr val="C8A86B"/>
-            </a:solidFill>
+          <a:ln>
+            <a:noFill/>
           </a:ln>
           <a:effectLst/>
         </p:spPr>
@@ -5182,14 +5746,14 @@
       </p:sp>
       <p:sp>
         <p:nvSpPr>
-          <p:cNvPr id="12" name="TextBox 11"/>
+          <p:cNvPr id="20" name="TextBox 19"/>
           <p:cNvSpPr txBox="1"/>
           <p:nvPr/>
         </p:nvSpPr>
         <p:spPr>
           <a:xfrm>
-            <a:off x="1371600" y="4041648"/>
-            <a:ext cx="9997135" cy="457200"/>
+            <a:off x="9098051" y="2194560"/>
+            <a:ext cx="2453563" cy="365760"/>
           </a:xfrm>
           <a:prstGeom prst="rect">
             <a:avLst/>
@@ -5202,35 +5766,31 @@
           </a:bodyPr>
           <a:lstStyle/>
           <a:p>
-            <a:pPr algn="l">
-              <a:lnSpc>
-                <a:spcPct val="110000"/>
-              </a:lnSpc>
-            </a:pPr>
-            <a:r>
-              <a:rPr sz="1600" b="1">
-                <a:solidFill>
-                  <a:srgbClr val="1C2A33"/>
+            <a:pPr algn="ctr"/>
+            <a:r>
+              <a:rPr sz="1500" b="1">
+                <a:solidFill>
+                  <a:srgbClr val="FFFFFF"/>
                 </a:solidFill>
                 <a:latin typeface="微软雅黑"/>
                 <a:ea typeface="微软雅黑"/>
                 <a:cs typeface="微软雅黑"/>
               </a:rPr>
-              <a:t/>
-            </a:r>
-          </a:p>
-        </p:txBody>
-      </p:sp>
-      <p:sp>
-        <p:nvSpPr>
-          <p:cNvPr id="13" name="TextBox 12"/>
+              <a:t>重点 4</a:t>
+            </a:r>
+          </a:p>
+        </p:txBody>
+      </p:sp>
+      <p:sp>
+        <p:nvSpPr>
+          <p:cNvPr id="21" name="TextBox 20"/>
           <p:cNvSpPr txBox="1"/>
           <p:nvPr/>
         </p:nvSpPr>
         <p:spPr>
           <a:xfrm>
-            <a:off x="1371600" y="4480560"/>
-            <a:ext cx="9997135" cy="530352"/>
+            <a:off x="9326651" y="2788920"/>
+            <a:ext cx="1996363" cy="3200400"/>
           </a:xfrm>
           <a:prstGeom prst="rect">
             <a:avLst/>
@@ -5245,139 +5805,14 @@
           <a:p>
             <a:pPr algn="l">
               <a:lnSpc>
-                <a:spcPct val="128000"/>
+                <a:spcPct val="150000"/>
               </a:lnSpc>
+              <a:spcAft>
+                <a:spcPts val="600"/>
+              </a:spcAft>
             </a:pPr>
             <a:r>
-              <a:rPr sz="1200" b="0">
-                <a:solidFill>
-                  <a:srgbClr val="1C2A33"/>
-                </a:solidFill>
-                <a:latin typeface="楷体"/>
-                <a:ea typeface="楷体"/>
-                <a:cs typeface="楷体"/>
-              </a:rPr>
-              <a:t>③ 与强氧化剂：2Fe+3Cl2=2FeCl3；与弱氧化剂：Fe+S=FeS(Fe+2)。</a:t>
-            </a:r>
-          </a:p>
-        </p:txBody>
-      </p:sp>
-      <p:sp>
-        <p:nvSpPr>
-          <p:cNvPr id="14" name="Rounded Rectangle 13"/>
-          <p:cNvSpPr/>
-          <p:nvPr/>
-        </p:nvSpPr>
-        <p:spPr>
-          <a:xfrm>
-            <a:off x="640080" y="5212080"/>
-            <a:ext cx="10911535" cy="1170432"/>
-          </a:xfrm>
-          <a:prstGeom prst="roundRect">
-            <a:avLst/>
-          </a:prstGeom>
-          <a:solidFill>
-            <a:srgbClr val="FFFFFF"/>
-          </a:solidFill>
-          <a:ln w="22860">
-            <a:solidFill>
-              <a:srgbClr val="C8A86B"/>
-            </a:solidFill>
-          </a:ln>
-          <a:effectLst/>
-        </p:spPr>
-        <p:style>
-          <a:lnRef idx="1">
-            <a:schemeClr val="accent1"/>
-          </a:lnRef>
-          <a:fillRef idx="3">
-            <a:schemeClr val="accent1"/>
-          </a:fillRef>
-          <a:effectRef idx="2">
-            <a:schemeClr val="accent1"/>
-          </a:effectRef>
-          <a:fontRef idx="minor">
-            <a:schemeClr val="lt1"/>
-          </a:fontRef>
-        </p:style>
-        <p:txBody>
-          <a:bodyPr rtlCol="0" anchor="ctr"/>
-          <a:lstStyle/>
-          <a:p>
-            <a:pPr algn="ctr"/>
-          </a:p>
-        </p:txBody>
-      </p:sp>
-      <p:sp>
-        <p:nvSpPr>
-          <p:cNvPr id="15" name="TextBox 14"/>
-          <p:cNvSpPr txBox="1"/>
-          <p:nvPr/>
-        </p:nvSpPr>
-        <p:spPr>
-          <a:xfrm>
-            <a:off x="1371600" y="5321808"/>
-            <a:ext cx="9997135" cy="457200"/>
-          </a:xfrm>
-          <a:prstGeom prst="rect">
-            <a:avLst/>
-          </a:prstGeom>
-          <a:noFill/>
-        </p:spPr>
-        <p:txBody>
-          <a:bodyPr wrap="square" anchor="t" lIns="0" rIns="0" tIns="0" bIns="0">
-            <a:spAutoFit/>
-          </a:bodyPr>
-          <a:lstStyle/>
-          <a:p>
-            <a:pPr algn="l">
-              <a:lnSpc>
-                <a:spcPct val="110000"/>
-              </a:lnSpc>
-            </a:pPr>
-            <a:r>
-              <a:rPr sz="1600" b="1">
-                <a:solidFill>
-                  <a:srgbClr val="1C2A33"/>
-                </a:solidFill>
-                <a:latin typeface="微软雅黑"/>
-                <a:ea typeface="微软雅黑"/>
-                <a:cs typeface="微软雅黑"/>
-              </a:rPr>
-              <a:t/>
-            </a:r>
-          </a:p>
-        </p:txBody>
-      </p:sp>
-      <p:sp>
-        <p:nvSpPr>
-          <p:cNvPr id="16" name="TextBox 15"/>
-          <p:cNvSpPr txBox="1"/>
-          <p:nvPr/>
-        </p:nvSpPr>
-        <p:spPr>
-          <a:xfrm>
-            <a:off x="1371600" y="5760720"/>
-            <a:ext cx="9997135" cy="530352"/>
-          </a:xfrm>
-          <a:prstGeom prst="rect">
-            <a:avLst/>
-          </a:prstGeom>
-          <a:noFill/>
-        </p:spPr>
-        <p:txBody>
-          <a:bodyPr wrap="square" anchor="t" lIns="0" rIns="0" tIns="0" bIns="0">
-            <a:spAutoFit/>
-          </a:bodyPr>
-          <a:lstStyle/>
-          <a:p>
-            <a:pPr algn="l">
-              <a:lnSpc>
-                <a:spcPct val="128000"/>
-              </a:lnSpc>
-            </a:pPr>
-            <a:r>
-              <a:rPr sz="1200" b="0">
+              <a:rPr sz="1350" b="0">
                 <a:solidFill>
                   <a:srgbClr val="1C2A33"/>
                 </a:solidFill>
@@ -5392,7 +5827,7 @@
       </p:sp>
       <p:sp>
         <p:nvSpPr>
-          <p:cNvPr id="17" name="TextBox 16"/>
+          <p:cNvPr id="22" name="TextBox 21"/>
           <p:cNvSpPr txBox="1"/>
           <p:nvPr/>
         </p:nvSpPr>
@@ -5519,13 +5954,13 @@
             <a:r>
               <a:rPr sz="1300" b="1">
                 <a:solidFill>
-                  <a:srgbClr val="2E7D6B"/>
+                  <a:srgbClr val="B23A2A"/>
                 </a:solidFill>
                 <a:latin typeface="微软雅黑"/>
                 <a:ea typeface="微软雅黑"/>
                 <a:cs typeface="微软雅黑"/>
               </a:rPr>
-              <a:t>学习路径</a:t>
+              <a:t>方法</a:t>
             </a:r>
           </a:p>
         </p:txBody>
@@ -5545,7 +5980,7 @@
             <a:avLst/>
           </a:prstGeom>
           <a:solidFill>
-            <a:srgbClr val="2E7D6B"/>
+            <a:srgbClr val="B23A2A"/>
           </a:solidFill>
           <a:ln>
             <a:noFill/>
@@ -5576,14 +6011,51 @@
       </p:sp>
       <p:sp>
         <p:nvSpPr>
-          <p:cNvPr id="5" name="Rounded Rectangle 4"/>
+          <p:cNvPr id="5" name="TextBox 4"/>
+          <p:cNvSpPr txBox="1"/>
+          <p:nvPr/>
+        </p:nvSpPr>
+        <p:spPr>
+          <a:xfrm>
+            <a:off x="640080" y="1280160"/>
+            <a:ext cx="10058400" cy="548640"/>
+          </a:xfrm>
+          <a:prstGeom prst="rect">
+            <a:avLst/>
+          </a:prstGeom>
+          <a:noFill/>
+        </p:spPr>
+        <p:txBody>
+          <a:bodyPr wrap="square" anchor="t" lIns="0" rIns="0" tIns="0" bIns="0">
+            <a:spAutoFit/>
+          </a:bodyPr>
+          <a:lstStyle/>
+          <a:p>
+            <a:pPr algn="l"/>
+            <a:r>
+              <a:rPr sz="2600" b="1">
+                <a:solidFill>
+                  <a:srgbClr val="1C2A33"/>
+                </a:solidFill>
+                <a:latin typeface="楷体"/>
+                <a:ea typeface="楷体"/>
+                <a:cs typeface="楷体"/>
+              </a:rPr>
+              <a:t>学习方法与招牌招式</a:t>
+            </a:r>
+          </a:p>
+        </p:txBody>
+      </p:sp>
+      <p:sp>
+        <p:nvSpPr>
+          <p:cNvPr id="6" name="Rounded Rectangle 5"/>
           <p:cNvSpPr/>
           <p:nvPr/>
         </p:nvSpPr>
         <p:spPr>
           <a:xfrm>
-            <a:off x="640080" y="1371600"/>
-            <a:ext cx="10911535" cy="685800"/>
+            <a:off x="640080" y="2011680"/>
+            <a:ext cx="5272887" cy="1691640"/>
           </a:xfrm>
           <a:prstGeom prst="roundRect">
             <a:avLst/>
@@ -5591,7 +6063,94 @@
           <a:solidFill>
             <a:srgbClr val="FFFFFF"/>
           </a:solidFill>
-          <a:ln w="22860">
+          <a:ln w="20320">
+            <a:solidFill>
+              <a:srgbClr val="B23A2A"/>
+            </a:solidFill>
+          </a:ln>
+          <a:effectLst/>
+        </p:spPr>
+        <p:style>
+          <a:lnRef idx="1">
+            <a:schemeClr val="accent1"/>
+          </a:lnRef>
+          <a:fillRef idx="3">
+            <a:schemeClr val="accent1"/>
+          </a:fillRef>
+          <a:effectRef idx="2">
+            <a:schemeClr val="accent1"/>
+          </a:effectRef>
+          <a:fontRef idx="minor">
+            <a:schemeClr val="lt1"/>
+          </a:fontRef>
+        </p:style>
+        <p:txBody>
+          <a:bodyPr rtlCol="0" anchor="ctr"/>
+          <a:lstStyle/>
+          <a:p>
+            <a:pPr algn="ctr"/>
+          </a:p>
+        </p:txBody>
+      </p:sp>
+      <p:sp>
+        <p:nvSpPr>
+          <p:cNvPr id="7" name="TextBox 6"/>
+          <p:cNvSpPr txBox="1"/>
+          <p:nvPr/>
+        </p:nvSpPr>
+        <p:spPr>
+          <a:xfrm>
+            <a:off x="914400" y="2240280"/>
+            <a:ext cx="4724247" cy="1234440"/>
+          </a:xfrm>
+          <a:prstGeom prst="rect">
+            <a:avLst/>
+          </a:prstGeom>
+          <a:noFill/>
+        </p:spPr>
+        <p:txBody>
+          <a:bodyPr wrap="square" anchor="t" lIns="0" rIns="0" tIns="0" bIns="0">
+            <a:spAutoFit/>
+          </a:bodyPr>
+          <a:lstStyle/>
+          <a:p>
+            <a:pPr algn="l">
+              <a:lnSpc>
+                <a:spcPct val="145000"/>
+              </a:lnSpc>
+            </a:pPr>
+            <a:r>
+              <a:rPr sz="1450" b="0">
+                <a:solidFill>
+                  <a:srgbClr val="1C2A33"/>
+                </a:solidFill>
+                <a:latin typeface="楷体"/>
+                <a:ea typeface="楷体"/>
+                <a:cs typeface="楷体"/>
+              </a:rPr>
+              <a:t>① 实验(铁与氯/硫)。</a:t>
+            </a:r>
+          </a:p>
+        </p:txBody>
+      </p:sp>
+      <p:sp>
+        <p:nvSpPr>
+          <p:cNvPr id="8" name="Rounded Rectangle 7"/>
+          <p:cNvSpPr/>
+          <p:nvPr/>
+        </p:nvSpPr>
+        <p:spPr>
+          <a:xfrm>
+            <a:off x="6278727" y="2011680"/>
+            <a:ext cx="5272887" cy="1691640"/>
+          </a:xfrm>
+          <a:prstGeom prst="roundRect">
+            <a:avLst/>
+          </a:prstGeom>
+          <a:solidFill>
+            <a:srgbClr val="FFFFFF"/>
+          </a:solidFill>
+          <a:ln w="20320">
             <a:solidFill>
               <a:srgbClr val="2E7D6B"/>
             </a:solidFill>
@@ -5622,23 +6181,66 @@
       </p:sp>
       <p:sp>
         <p:nvSpPr>
-          <p:cNvPr id="6" name="Oval 5"/>
+          <p:cNvPr id="9" name="TextBox 8"/>
+          <p:cNvSpPr txBox="1"/>
+          <p:nvPr/>
+        </p:nvSpPr>
+        <p:spPr>
+          <a:xfrm>
+            <a:off x="6553047" y="2240280"/>
+            <a:ext cx="4724247" cy="1234440"/>
+          </a:xfrm>
+          <a:prstGeom prst="rect">
+            <a:avLst/>
+          </a:prstGeom>
+          <a:noFill/>
+        </p:spPr>
+        <p:txBody>
+          <a:bodyPr wrap="square" anchor="t" lIns="0" rIns="0" tIns="0" bIns="0">
+            <a:spAutoFit/>
+          </a:bodyPr>
+          <a:lstStyle/>
+          <a:p>
+            <a:pPr algn="l">
+              <a:lnSpc>
+                <a:spcPct val="145000"/>
+              </a:lnSpc>
+            </a:pPr>
+            <a:r>
+              <a:rPr sz="1450" b="0">
+                <a:solidFill>
+                  <a:srgbClr val="1C2A33"/>
+                </a:solidFill>
+                <a:latin typeface="楷体"/>
+                <a:ea typeface="楷体"/>
+                <a:cs typeface="楷体"/>
+              </a:rPr>
+              <a:t>② 价态分析法。</a:t>
+            </a:r>
+          </a:p>
+        </p:txBody>
+      </p:sp>
+      <p:sp>
+        <p:nvSpPr>
+          <p:cNvPr id="10" name="Rounded Rectangle 9"/>
           <p:cNvSpPr/>
           <p:nvPr/>
         </p:nvSpPr>
         <p:spPr>
           <a:xfrm>
-            <a:off x="804672" y="1536192"/>
-            <a:ext cx="457200" cy="457200"/>
-          </a:xfrm>
-          <a:prstGeom prst="ellipse">
+            <a:off x="640080" y="3931920"/>
+            <a:ext cx="5272887" cy="1691640"/>
+          </a:xfrm>
+          <a:prstGeom prst="roundRect">
             <a:avLst/>
           </a:prstGeom>
           <a:solidFill>
-            <a:srgbClr val="2E7D6B"/>
+            <a:srgbClr val="FFFFFF"/>
           </a:solidFill>
-          <a:ln>
-            <a:noFill/>
+          <a:ln w="20320">
+            <a:solidFill>
+              <a:srgbClr val="C8A86B"/>
+            </a:solidFill>
           </a:ln>
           <a:effectLst/>
         </p:spPr>
@@ -5666,14 +6268,14 @@
       </p:sp>
       <p:sp>
         <p:nvSpPr>
-          <p:cNvPr id="7" name="TextBox 6"/>
+          <p:cNvPr id="11" name="TextBox 10"/>
           <p:cNvSpPr txBox="1"/>
           <p:nvPr/>
         </p:nvSpPr>
         <p:spPr>
           <a:xfrm>
-            <a:off x="804672" y="1591056"/>
-            <a:ext cx="457200" cy="384048"/>
+            <a:off x="914400" y="4160520"/>
+            <a:ext cx="4724247" cy="1234440"/>
           </a:xfrm>
           <a:prstGeom prst="rect">
             <a:avLst/>
@@ -5686,72 +6288,35 @@
           </a:bodyPr>
           <a:lstStyle/>
           <a:p>
-            <a:pPr algn="ctr"/>
-            <a:r>
-              <a:rPr sz="1600" b="1">
-                <a:solidFill>
-                  <a:srgbClr val="FFFFFF"/>
-                </a:solidFill>
-                <a:latin typeface="微软雅黑"/>
-                <a:ea typeface="微软雅黑"/>
-                <a:cs typeface="微软雅黑"/>
-              </a:rPr>
-              <a:t>1</a:t>
-            </a:r>
-          </a:p>
-        </p:txBody>
-      </p:sp>
-      <p:sp>
-        <p:nvSpPr>
-          <p:cNvPr id="8" name="TextBox 7"/>
-          <p:cNvSpPr txBox="1"/>
-          <p:nvPr/>
-        </p:nvSpPr>
-        <p:spPr>
-          <a:xfrm>
-            <a:off x="1371600" y="1481328"/>
-            <a:ext cx="9997135" cy="484632"/>
-          </a:xfrm>
-          <a:prstGeom prst="rect">
-            <a:avLst/>
-          </a:prstGeom>
-          <a:noFill/>
-        </p:spPr>
-        <p:txBody>
-          <a:bodyPr wrap="square" anchor="t" lIns="0" rIns="0" tIns="0" bIns="0">
-            <a:spAutoFit/>
-          </a:bodyPr>
-          <a:lstStyle/>
-          <a:p>
             <a:pPr algn="l">
               <a:lnSpc>
-                <a:spcPct val="110000"/>
+                <a:spcPct val="145000"/>
               </a:lnSpc>
             </a:pPr>
             <a:r>
-              <a:rPr sz="1600" b="1">
+              <a:rPr sz="1450" b="0">
                 <a:solidFill>
                   <a:srgbClr val="1C2A33"/>
                 </a:solidFill>
-                <a:latin typeface="微软雅黑"/>
-                <a:ea typeface="微软雅黑"/>
-                <a:cs typeface="微软雅黑"/>
+                <a:latin typeface="楷体"/>
+                <a:ea typeface="楷体"/>
+                <a:cs typeface="楷体"/>
               </a:rPr>
-              <a:t>Step 1 导入</a:t>
-            </a:r>
-          </a:p>
-        </p:txBody>
-      </p:sp>
-      <p:sp>
-        <p:nvSpPr>
-          <p:cNvPr id="9" name="Rounded Rectangle 8"/>
+              <a:t>③ 对比(三种氧化物)。</a:t>
+            </a:r>
+          </a:p>
+        </p:txBody>
+      </p:sp>
+      <p:sp>
+        <p:nvSpPr>
+          <p:cNvPr id="12" name="Rounded Rectangle 11"/>
           <p:cNvSpPr/>
           <p:nvPr/>
         </p:nvSpPr>
         <p:spPr>
           <a:xfrm>
-            <a:off x="640080" y="2194560"/>
-            <a:ext cx="10911535" cy="685800"/>
+            <a:off x="6278727" y="3931920"/>
+            <a:ext cx="5272887" cy="1691640"/>
           </a:xfrm>
           <a:prstGeom prst="roundRect">
             <a:avLst/>
@@ -5759,9 +6324,9 @@
           <a:solidFill>
             <a:srgbClr val="FFFFFF"/>
           </a:solidFill>
-          <a:ln w="22860">
+          <a:ln w="20320">
             <a:solidFill>
-              <a:srgbClr val="2E7D6B"/>
+              <a:srgbClr val="6B6258"/>
             </a:solidFill>
           </a:ln>
           <a:effectLst/>
@@ -5790,24 +6355,62 @@
       </p:sp>
       <p:sp>
         <p:nvSpPr>
-          <p:cNvPr id="10" name="Oval 9"/>
+          <p:cNvPr id="13" name="TextBox 12"/>
+          <p:cNvSpPr txBox="1"/>
+          <p:nvPr/>
+        </p:nvSpPr>
+        <p:spPr>
+          <a:xfrm>
+            <a:off x="6553047" y="4160520"/>
+            <a:ext cx="4724247" cy="1234440"/>
+          </a:xfrm>
+          <a:prstGeom prst="rect">
+            <a:avLst/>
+          </a:prstGeom>
+          <a:noFill/>
+        </p:spPr>
+        <p:txBody>
+          <a:bodyPr wrap="square" anchor="t" lIns="0" rIns="0" tIns="0" bIns="0">
+            <a:spAutoFit/>
+          </a:bodyPr>
+          <a:lstStyle/>
+          <a:p>
+            <a:pPr algn="l">
+              <a:lnSpc>
+                <a:spcPct val="145000"/>
+              </a:lnSpc>
+            </a:pPr>
+            <a:r>
+              <a:rPr sz="1450" b="0">
+                <a:solidFill>
+                  <a:srgbClr val="1C2A33"/>
+                </a:solidFill>
+                <a:latin typeface="楷体"/>
+                <a:ea typeface="楷体"/>
+                <a:cs typeface="楷体"/>
+              </a:rPr>
+              <a:t>④ 实物观察。</a:t>
+            </a:r>
+          </a:p>
+        </p:txBody>
+      </p:sp>
+      <p:sp>
+        <p:nvSpPr>
+          <p:cNvPr id="14" name="Rounded Rectangle 13"/>
           <p:cNvSpPr/>
           <p:nvPr/>
         </p:nvSpPr>
         <p:spPr>
           <a:xfrm>
-            <a:off x="804672" y="2359152"/>
-            <a:ext cx="457200" cy="457200"/>
-          </a:xfrm>
-          <a:prstGeom prst="ellipse">
+            <a:off x="640080" y="5669280"/>
+            <a:ext cx="10911535" cy="868680"/>
+          </a:xfrm>
+          <a:prstGeom prst="roundRect">
             <a:avLst/>
           </a:prstGeom>
           <a:solidFill>
-            <a:srgbClr val="2E7D6B"/>
+            <a:srgbClr val="1C2A33"/>
           </a:solidFill>
-          <a:ln>
-            <a:noFill/>
-          </a:ln>
           <a:effectLst/>
         </p:spPr>
         <p:style>
@@ -5834,14 +6437,14 @@
       </p:sp>
       <p:sp>
         <p:nvSpPr>
-          <p:cNvPr id="11" name="TextBox 10"/>
+          <p:cNvPr id="15" name="TextBox 14"/>
           <p:cNvSpPr txBox="1"/>
           <p:nvPr/>
         </p:nvSpPr>
         <p:spPr>
           <a:xfrm>
-            <a:off x="804672" y="2414016"/>
-            <a:ext cx="457200" cy="384048"/>
+            <a:off x="914400" y="5779008"/>
+            <a:ext cx="10362895" cy="685800"/>
           </a:xfrm>
           <a:prstGeom prst="rect">
             <a:avLst/>
@@ -5854,31 +6457,35 @@
           </a:bodyPr>
           <a:lstStyle/>
           <a:p>
-            <a:pPr algn="ctr"/>
-            <a:r>
-              <a:rPr sz="1600" b="1">
+            <a:pPr algn="l">
+              <a:lnSpc>
+                <a:spcPct val="140000"/>
+              </a:lnSpc>
+            </a:pPr>
+            <a:r>
+              <a:rPr sz="1350" b="0">
                 <a:solidFill>
                   <a:srgbClr val="FFFFFF"/>
                 </a:solidFill>
-                <a:latin typeface="微软雅黑"/>
-                <a:ea typeface="微软雅黑"/>
-                <a:cs typeface="微软雅黑"/>
+                <a:latin typeface="楷体"/>
+                <a:ea typeface="楷体"/>
+                <a:cs typeface="楷体"/>
               </a:rPr>
-              <a:t>2</a:t>
-            </a:r>
-          </a:p>
-        </p:txBody>
-      </p:sp>
-      <p:sp>
-        <p:nvSpPr>
-          <p:cNvPr id="12" name="TextBox 11"/>
+              <a:t>招牌招式 · 以“氧化剂强弱决定 Fe 价态”统摄：Cl2→+3，S、H+→+2。</a:t>
+            </a:r>
+          </a:p>
+        </p:txBody>
+      </p:sp>
+      <p:sp>
+        <p:nvSpPr>
+          <p:cNvPr id="16" name="TextBox 15"/>
           <p:cNvSpPr txBox="1"/>
           <p:nvPr/>
         </p:nvSpPr>
         <p:spPr>
           <a:xfrm>
-            <a:off x="1371600" y="2304288"/>
-            <a:ext cx="9997135" cy="484632"/>
+            <a:off x="11002975" y="6355080"/>
+            <a:ext cx="731520" cy="320040"/>
           </a:xfrm>
           <a:prstGeom prst="rect">
             <a:avLst/>
@@ -5891,724 +6498,11 @@
           </a:bodyPr>
           <a:lstStyle/>
           <a:p>
-            <a:pPr algn="l">
-              <a:lnSpc>
-                <a:spcPct val="110000"/>
-              </a:lnSpc>
-            </a:pPr>
-            <a:r>
-              <a:rPr sz="1600" b="1">
-                <a:solidFill>
-                  <a:srgbClr val="1C2A33"/>
-                </a:solidFill>
-                <a:latin typeface="微软雅黑"/>
-                <a:ea typeface="微软雅黑"/>
-                <a:cs typeface="微软雅黑"/>
-              </a:rPr>
-              <a:t>Step 2 与氧气氯气</a:t>
-            </a:r>
-          </a:p>
-        </p:txBody>
-      </p:sp>
-      <p:sp>
-        <p:nvSpPr>
-          <p:cNvPr id="13" name="Rounded Rectangle 12"/>
-          <p:cNvSpPr/>
-          <p:nvPr/>
-        </p:nvSpPr>
-        <p:spPr>
-          <a:xfrm>
-            <a:off x="640080" y="3017520"/>
-            <a:ext cx="10911535" cy="685800"/>
-          </a:xfrm>
-          <a:prstGeom prst="roundRect">
-            <a:avLst/>
-          </a:prstGeom>
-          <a:solidFill>
-            <a:srgbClr val="FFFFFF"/>
-          </a:solidFill>
-          <a:ln w="22860">
-            <a:solidFill>
-              <a:srgbClr val="2E7D6B"/>
-            </a:solidFill>
-          </a:ln>
-          <a:effectLst/>
-        </p:spPr>
-        <p:style>
-          <a:lnRef idx="1">
-            <a:schemeClr val="accent1"/>
-          </a:lnRef>
-          <a:fillRef idx="3">
-            <a:schemeClr val="accent1"/>
-          </a:fillRef>
-          <a:effectRef idx="2">
-            <a:schemeClr val="accent1"/>
-          </a:effectRef>
-          <a:fontRef idx="minor">
-            <a:schemeClr val="lt1"/>
-          </a:fontRef>
-        </p:style>
-        <p:txBody>
-          <a:bodyPr rtlCol="0" anchor="ctr"/>
-          <a:lstStyle/>
-          <a:p>
-            <a:pPr algn="ctr"/>
-          </a:p>
-        </p:txBody>
-      </p:sp>
-      <p:sp>
-        <p:nvSpPr>
-          <p:cNvPr id="14" name="Oval 13"/>
-          <p:cNvSpPr/>
-          <p:nvPr/>
-        </p:nvSpPr>
-        <p:spPr>
-          <a:xfrm>
-            <a:off x="804672" y="3182112"/>
-            <a:ext cx="457200" cy="457200"/>
-          </a:xfrm>
-          <a:prstGeom prst="ellipse">
-            <a:avLst/>
-          </a:prstGeom>
-          <a:solidFill>
-            <a:srgbClr val="2E7D6B"/>
-          </a:solidFill>
-          <a:ln>
-            <a:noFill/>
-          </a:ln>
-          <a:effectLst/>
-        </p:spPr>
-        <p:style>
-          <a:lnRef idx="1">
-            <a:schemeClr val="accent1"/>
-          </a:lnRef>
-          <a:fillRef idx="3">
-            <a:schemeClr val="accent1"/>
-          </a:fillRef>
-          <a:effectRef idx="2">
-            <a:schemeClr val="accent1"/>
-          </a:effectRef>
-          <a:fontRef idx="minor">
-            <a:schemeClr val="lt1"/>
-          </a:fontRef>
-        </p:style>
-        <p:txBody>
-          <a:bodyPr rtlCol="0" anchor="ctr"/>
-          <a:lstStyle/>
-          <a:p>
-            <a:pPr algn="ctr"/>
-          </a:p>
-        </p:txBody>
-      </p:sp>
-      <p:sp>
-        <p:nvSpPr>
-          <p:cNvPr id="15" name="TextBox 14"/>
-          <p:cNvSpPr txBox="1"/>
-          <p:nvPr/>
-        </p:nvSpPr>
-        <p:spPr>
-          <a:xfrm>
-            <a:off x="804672" y="3236976"/>
-            <a:ext cx="457200" cy="384048"/>
-          </a:xfrm>
-          <a:prstGeom prst="rect">
-            <a:avLst/>
-          </a:prstGeom>
-          <a:noFill/>
-        </p:spPr>
-        <p:txBody>
-          <a:bodyPr wrap="square" anchor="t" lIns="0" rIns="0" tIns="0" bIns="0">
-            <a:spAutoFit/>
-          </a:bodyPr>
-          <a:lstStyle/>
-          <a:p>
-            <a:pPr algn="ctr"/>
-            <a:r>
-              <a:rPr sz="1600" b="1">
+            <a:pPr algn="r"/>
+            <a:r>
+              <a:rPr sz="1100" b="0">
                 <a:solidFill>
                   <a:srgbClr val="FFFFFF"/>
-                </a:solidFill>
-                <a:latin typeface="微软雅黑"/>
-                <a:ea typeface="微软雅黑"/>
-                <a:cs typeface="微软雅黑"/>
-              </a:rPr>
-              <a:t>3</a:t>
-            </a:r>
-          </a:p>
-        </p:txBody>
-      </p:sp>
-      <p:sp>
-        <p:nvSpPr>
-          <p:cNvPr id="16" name="TextBox 15"/>
-          <p:cNvSpPr txBox="1"/>
-          <p:nvPr/>
-        </p:nvSpPr>
-        <p:spPr>
-          <a:xfrm>
-            <a:off x="1371600" y="3127248"/>
-            <a:ext cx="9997135" cy="484632"/>
-          </a:xfrm>
-          <a:prstGeom prst="rect">
-            <a:avLst/>
-          </a:prstGeom>
-          <a:noFill/>
-        </p:spPr>
-        <p:txBody>
-          <a:bodyPr wrap="square" anchor="t" lIns="0" rIns="0" tIns="0" bIns="0">
-            <a:spAutoFit/>
-          </a:bodyPr>
-          <a:lstStyle/>
-          <a:p>
-            <a:pPr algn="l">
-              <a:lnSpc>
-                <a:spcPct val="110000"/>
-              </a:lnSpc>
-            </a:pPr>
-            <a:r>
-              <a:rPr sz="1600" b="1">
-                <a:solidFill>
-                  <a:srgbClr val="1C2A33"/>
-                </a:solidFill>
-                <a:latin typeface="微软雅黑"/>
-                <a:ea typeface="微软雅黑"/>
-                <a:cs typeface="微软雅黑"/>
-              </a:rPr>
-              <a:t>Step 3 与酸与盐</a:t>
-            </a:r>
-          </a:p>
-        </p:txBody>
-      </p:sp>
-      <p:sp>
-        <p:nvSpPr>
-          <p:cNvPr id="17" name="Rounded Rectangle 16"/>
-          <p:cNvSpPr/>
-          <p:nvPr/>
-        </p:nvSpPr>
-        <p:spPr>
-          <a:xfrm>
-            <a:off x="640080" y="3840480"/>
-            <a:ext cx="10911535" cy="685800"/>
-          </a:xfrm>
-          <a:prstGeom prst="roundRect">
-            <a:avLst/>
-          </a:prstGeom>
-          <a:solidFill>
-            <a:srgbClr val="FFFFFF"/>
-          </a:solidFill>
-          <a:ln w="22860">
-            <a:solidFill>
-              <a:srgbClr val="2E7D6B"/>
-            </a:solidFill>
-          </a:ln>
-          <a:effectLst/>
-        </p:spPr>
-        <p:style>
-          <a:lnRef idx="1">
-            <a:schemeClr val="accent1"/>
-          </a:lnRef>
-          <a:fillRef idx="3">
-            <a:schemeClr val="accent1"/>
-          </a:fillRef>
-          <a:effectRef idx="2">
-            <a:schemeClr val="accent1"/>
-          </a:effectRef>
-          <a:fontRef idx="minor">
-            <a:schemeClr val="lt1"/>
-          </a:fontRef>
-        </p:style>
-        <p:txBody>
-          <a:bodyPr rtlCol="0" anchor="ctr"/>
-          <a:lstStyle/>
-          <a:p>
-            <a:pPr algn="ctr"/>
-          </a:p>
-        </p:txBody>
-      </p:sp>
-      <p:sp>
-        <p:nvSpPr>
-          <p:cNvPr id="18" name="Oval 17"/>
-          <p:cNvSpPr/>
-          <p:nvPr/>
-        </p:nvSpPr>
-        <p:spPr>
-          <a:xfrm>
-            <a:off x="804672" y="4005072"/>
-            <a:ext cx="457200" cy="457200"/>
-          </a:xfrm>
-          <a:prstGeom prst="ellipse">
-            <a:avLst/>
-          </a:prstGeom>
-          <a:solidFill>
-            <a:srgbClr val="2E7D6B"/>
-          </a:solidFill>
-          <a:ln>
-            <a:noFill/>
-          </a:ln>
-          <a:effectLst/>
-        </p:spPr>
-        <p:style>
-          <a:lnRef idx="1">
-            <a:schemeClr val="accent1"/>
-          </a:lnRef>
-          <a:fillRef idx="3">
-            <a:schemeClr val="accent1"/>
-          </a:fillRef>
-          <a:effectRef idx="2">
-            <a:schemeClr val="accent1"/>
-          </a:effectRef>
-          <a:fontRef idx="minor">
-            <a:schemeClr val="lt1"/>
-          </a:fontRef>
-        </p:style>
-        <p:txBody>
-          <a:bodyPr rtlCol="0" anchor="ctr"/>
-          <a:lstStyle/>
-          <a:p>
-            <a:pPr algn="ctr"/>
-          </a:p>
-        </p:txBody>
-      </p:sp>
-      <p:sp>
-        <p:nvSpPr>
-          <p:cNvPr id="19" name="TextBox 18"/>
-          <p:cNvSpPr txBox="1"/>
-          <p:nvPr/>
-        </p:nvSpPr>
-        <p:spPr>
-          <a:xfrm>
-            <a:off x="804672" y="4059936"/>
-            <a:ext cx="457200" cy="384048"/>
-          </a:xfrm>
-          <a:prstGeom prst="rect">
-            <a:avLst/>
-          </a:prstGeom>
-          <a:noFill/>
-        </p:spPr>
-        <p:txBody>
-          <a:bodyPr wrap="square" anchor="t" lIns="0" rIns="0" tIns="0" bIns="0">
-            <a:spAutoFit/>
-          </a:bodyPr>
-          <a:lstStyle/>
-          <a:p>
-            <a:pPr algn="ctr"/>
-            <a:r>
-              <a:rPr sz="1600" b="1">
-                <a:solidFill>
-                  <a:srgbClr val="FFFFFF"/>
-                </a:solidFill>
-                <a:latin typeface="微软雅黑"/>
-                <a:ea typeface="微软雅黑"/>
-                <a:cs typeface="微软雅黑"/>
-              </a:rPr>
-              <a:t>4</a:t>
-            </a:r>
-          </a:p>
-        </p:txBody>
-      </p:sp>
-      <p:sp>
-        <p:nvSpPr>
-          <p:cNvPr id="20" name="TextBox 19"/>
-          <p:cNvSpPr txBox="1"/>
-          <p:nvPr/>
-        </p:nvSpPr>
-        <p:spPr>
-          <a:xfrm>
-            <a:off x="1371600" y="3950208"/>
-            <a:ext cx="9997135" cy="484632"/>
-          </a:xfrm>
-          <a:prstGeom prst="rect">
-            <a:avLst/>
-          </a:prstGeom>
-          <a:noFill/>
-        </p:spPr>
-        <p:txBody>
-          <a:bodyPr wrap="square" anchor="t" lIns="0" rIns="0" tIns="0" bIns="0">
-            <a:spAutoFit/>
-          </a:bodyPr>
-          <a:lstStyle/>
-          <a:p>
-            <a:pPr algn="l">
-              <a:lnSpc>
-                <a:spcPct val="110000"/>
-              </a:lnSpc>
-            </a:pPr>
-            <a:r>
-              <a:rPr sz="1600" b="1">
-                <a:solidFill>
-                  <a:srgbClr val="1C2A33"/>
-                </a:solidFill>
-                <a:latin typeface="微软雅黑"/>
-                <a:ea typeface="微软雅黑"/>
-                <a:cs typeface="微软雅黑"/>
-              </a:rPr>
-              <a:t>Step 4 三种氧化物</a:t>
-            </a:r>
-          </a:p>
-        </p:txBody>
-      </p:sp>
-      <p:sp>
-        <p:nvSpPr>
-          <p:cNvPr id="21" name="Rounded Rectangle 20"/>
-          <p:cNvSpPr/>
-          <p:nvPr/>
-        </p:nvSpPr>
-        <p:spPr>
-          <a:xfrm>
-            <a:off x="640080" y="4663440"/>
-            <a:ext cx="10911535" cy="685800"/>
-          </a:xfrm>
-          <a:prstGeom prst="roundRect">
-            <a:avLst/>
-          </a:prstGeom>
-          <a:solidFill>
-            <a:srgbClr val="FFFFFF"/>
-          </a:solidFill>
-          <a:ln w="22860">
-            <a:solidFill>
-              <a:srgbClr val="2E7D6B"/>
-            </a:solidFill>
-          </a:ln>
-          <a:effectLst/>
-        </p:spPr>
-        <p:style>
-          <a:lnRef idx="1">
-            <a:schemeClr val="accent1"/>
-          </a:lnRef>
-          <a:fillRef idx="3">
-            <a:schemeClr val="accent1"/>
-          </a:fillRef>
-          <a:effectRef idx="2">
-            <a:schemeClr val="accent1"/>
-          </a:effectRef>
-          <a:fontRef idx="minor">
-            <a:schemeClr val="lt1"/>
-          </a:fontRef>
-        </p:style>
-        <p:txBody>
-          <a:bodyPr rtlCol="0" anchor="ctr"/>
-          <a:lstStyle/>
-          <a:p>
-            <a:pPr algn="ctr"/>
-          </a:p>
-        </p:txBody>
-      </p:sp>
-      <p:sp>
-        <p:nvSpPr>
-          <p:cNvPr id="22" name="Oval 21"/>
-          <p:cNvSpPr/>
-          <p:nvPr/>
-        </p:nvSpPr>
-        <p:spPr>
-          <a:xfrm>
-            <a:off x="804672" y="4828032"/>
-            <a:ext cx="457200" cy="457200"/>
-          </a:xfrm>
-          <a:prstGeom prst="ellipse">
-            <a:avLst/>
-          </a:prstGeom>
-          <a:solidFill>
-            <a:srgbClr val="2E7D6B"/>
-          </a:solidFill>
-          <a:ln>
-            <a:noFill/>
-          </a:ln>
-          <a:effectLst/>
-        </p:spPr>
-        <p:style>
-          <a:lnRef idx="1">
-            <a:schemeClr val="accent1"/>
-          </a:lnRef>
-          <a:fillRef idx="3">
-            <a:schemeClr val="accent1"/>
-          </a:fillRef>
-          <a:effectRef idx="2">
-            <a:schemeClr val="accent1"/>
-          </a:effectRef>
-          <a:fontRef idx="minor">
-            <a:schemeClr val="lt1"/>
-          </a:fontRef>
-        </p:style>
-        <p:txBody>
-          <a:bodyPr rtlCol="0" anchor="ctr"/>
-          <a:lstStyle/>
-          <a:p>
-            <a:pPr algn="ctr"/>
-          </a:p>
-        </p:txBody>
-      </p:sp>
-      <p:sp>
-        <p:nvSpPr>
-          <p:cNvPr id="23" name="TextBox 22"/>
-          <p:cNvSpPr txBox="1"/>
-          <p:nvPr/>
-        </p:nvSpPr>
-        <p:spPr>
-          <a:xfrm>
-            <a:off x="804672" y="4882896"/>
-            <a:ext cx="457200" cy="384048"/>
-          </a:xfrm>
-          <a:prstGeom prst="rect">
-            <a:avLst/>
-          </a:prstGeom>
-          <a:noFill/>
-        </p:spPr>
-        <p:txBody>
-          <a:bodyPr wrap="square" anchor="t" lIns="0" rIns="0" tIns="0" bIns="0">
-            <a:spAutoFit/>
-          </a:bodyPr>
-          <a:lstStyle/>
-          <a:p>
-            <a:pPr algn="ctr"/>
-            <a:r>
-              <a:rPr sz="1600" b="1">
-                <a:solidFill>
-                  <a:srgbClr val="FFFFFF"/>
-                </a:solidFill>
-                <a:latin typeface="微软雅黑"/>
-                <a:ea typeface="微软雅黑"/>
-                <a:cs typeface="微软雅黑"/>
-              </a:rPr>
-              <a:t>5</a:t>
-            </a:r>
-          </a:p>
-        </p:txBody>
-      </p:sp>
-      <p:sp>
-        <p:nvSpPr>
-          <p:cNvPr id="24" name="TextBox 23"/>
-          <p:cNvSpPr txBox="1"/>
-          <p:nvPr/>
-        </p:nvSpPr>
-        <p:spPr>
-          <a:xfrm>
-            <a:off x="1371600" y="4773168"/>
-            <a:ext cx="9997135" cy="484632"/>
-          </a:xfrm>
-          <a:prstGeom prst="rect">
-            <a:avLst/>
-          </a:prstGeom>
-          <a:noFill/>
-        </p:spPr>
-        <p:txBody>
-          <a:bodyPr wrap="square" anchor="t" lIns="0" rIns="0" tIns="0" bIns="0">
-            <a:spAutoFit/>
-          </a:bodyPr>
-          <a:lstStyle/>
-          <a:p>
-            <a:pPr algn="l">
-              <a:lnSpc>
-                <a:spcPct val="110000"/>
-              </a:lnSpc>
-            </a:pPr>
-            <a:r>
-              <a:rPr sz="1600" b="1">
-                <a:solidFill>
-                  <a:srgbClr val="1C2A33"/>
-                </a:solidFill>
-                <a:latin typeface="微软雅黑"/>
-                <a:ea typeface="微软雅黑"/>
-                <a:cs typeface="微软雅黑"/>
-              </a:rPr>
-              <a:t>Step 5 锈蚀防护</a:t>
-            </a:r>
-          </a:p>
-        </p:txBody>
-      </p:sp>
-      <p:sp>
-        <p:nvSpPr>
-          <p:cNvPr id="25" name="Rounded Rectangle 24"/>
-          <p:cNvSpPr/>
-          <p:nvPr/>
-        </p:nvSpPr>
-        <p:spPr>
-          <a:xfrm>
-            <a:off x="640080" y="5486400"/>
-            <a:ext cx="10911535" cy="685800"/>
-          </a:xfrm>
-          <a:prstGeom prst="roundRect">
-            <a:avLst/>
-          </a:prstGeom>
-          <a:solidFill>
-            <a:srgbClr val="FFFFFF"/>
-          </a:solidFill>
-          <a:ln w="22860">
-            <a:solidFill>
-              <a:srgbClr val="2E7D6B"/>
-            </a:solidFill>
-          </a:ln>
-          <a:effectLst/>
-        </p:spPr>
-        <p:style>
-          <a:lnRef idx="1">
-            <a:schemeClr val="accent1"/>
-          </a:lnRef>
-          <a:fillRef idx="3">
-            <a:schemeClr val="accent1"/>
-          </a:fillRef>
-          <a:effectRef idx="2">
-            <a:schemeClr val="accent1"/>
-          </a:effectRef>
-          <a:fontRef idx="minor">
-            <a:schemeClr val="lt1"/>
-          </a:fontRef>
-        </p:style>
-        <p:txBody>
-          <a:bodyPr rtlCol="0" anchor="ctr"/>
-          <a:lstStyle/>
-          <a:p>
-            <a:pPr algn="ctr"/>
-          </a:p>
-        </p:txBody>
-      </p:sp>
-      <p:sp>
-        <p:nvSpPr>
-          <p:cNvPr id="26" name="Oval 25"/>
-          <p:cNvSpPr/>
-          <p:nvPr/>
-        </p:nvSpPr>
-        <p:spPr>
-          <a:xfrm>
-            <a:off x="804672" y="5650992"/>
-            <a:ext cx="457200" cy="457200"/>
-          </a:xfrm>
-          <a:prstGeom prst="ellipse">
-            <a:avLst/>
-          </a:prstGeom>
-          <a:solidFill>
-            <a:srgbClr val="2E7D6B"/>
-          </a:solidFill>
-          <a:ln>
-            <a:noFill/>
-          </a:ln>
-          <a:effectLst/>
-        </p:spPr>
-        <p:style>
-          <a:lnRef idx="1">
-            <a:schemeClr val="accent1"/>
-          </a:lnRef>
-          <a:fillRef idx="3">
-            <a:schemeClr val="accent1"/>
-          </a:fillRef>
-          <a:effectRef idx="2">
-            <a:schemeClr val="accent1"/>
-          </a:effectRef>
-          <a:fontRef idx="minor">
-            <a:schemeClr val="lt1"/>
-          </a:fontRef>
-        </p:style>
-        <p:txBody>
-          <a:bodyPr rtlCol="0" anchor="ctr"/>
-          <a:lstStyle/>
-          <a:p>
-            <a:pPr algn="ctr"/>
-          </a:p>
-        </p:txBody>
-      </p:sp>
-      <p:sp>
-        <p:nvSpPr>
-          <p:cNvPr id="27" name="TextBox 26"/>
-          <p:cNvSpPr txBox="1"/>
-          <p:nvPr/>
-        </p:nvSpPr>
-        <p:spPr>
-          <a:xfrm>
-            <a:off x="804672" y="5705856"/>
-            <a:ext cx="457200" cy="384048"/>
-          </a:xfrm>
-          <a:prstGeom prst="rect">
-            <a:avLst/>
-          </a:prstGeom>
-          <a:noFill/>
-        </p:spPr>
-        <p:txBody>
-          <a:bodyPr wrap="square" anchor="t" lIns="0" rIns="0" tIns="0" bIns="0">
-            <a:spAutoFit/>
-          </a:bodyPr>
-          <a:lstStyle/>
-          <a:p>
-            <a:pPr algn="ctr"/>
-            <a:r>
-              <a:rPr sz="1600" b="1">
-                <a:solidFill>
-                  <a:srgbClr val="FFFFFF"/>
-                </a:solidFill>
-                <a:latin typeface="微软雅黑"/>
-                <a:ea typeface="微软雅黑"/>
-                <a:cs typeface="微软雅黑"/>
-              </a:rPr>
-              <a:t>6</a:t>
-            </a:r>
-          </a:p>
-        </p:txBody>
-      </p:sp>
-      <p:sp>
-        <p:nvSpPr>
-          <p:cNvPr id="28" name="TextBox 27"/>
-          <p:cNvSpPr txBox="1"/>
-          <p:nvPr/>
-        </p:nvSpPr>
-        <p:spPr>
-          <a:xfrm>
-            <a:off x="1371600" y="5596128"/>
-            <a:ext cx="9997135" cy="484632"/>
-          </a:xfrm>
-          <a:prstGeom prst="rect">
-            <a:avLst/>
-          </a:prstGeom>
-          <a:noFill/>
-        </p:spPr>
-        <p:txBody>
-          <a:bodyPr wrap="square" anchor="t" lIns="0" rIns="0" tIns="0" bIns="0">
-            <a:spAutoFit/>
-          </a:bodyPr>
-          <a:lstStyle/>
-          <a:p>
-            <a:pPr algn="l">
-              <a:lnSpc>
-                <a:spcPct val="110000"/>
-              </a:lnSpc>
-            </a:pPr>
-            <a:r>
-              <a:rPr sz="1600" b="1">
-                <a:solidFill>
-                  <a:srgbClr val="1C2A33"/>
-                </a:solidFill>
-                <a:latin typeface="微软雅黑"/>
-                <a:ea typeface="微软雅黑"/>
-                <a:cs typeface="微软雅黑"/>
-              </a:rPr>
-              <a:t>Step 6 练习+作业</a:t>
-            </a:r>
-          </a:p>
-        </p:txBody>
-      </p:sp>
-      <p:sp>
-        <p:nvSpPr>
-          <p:cNvPr id="29" name="TextBox 28"/>
-          <p:cNvSpPr txBox="1"/>
-          <p:nvPr/>
-        </p:nvSpPr>
-        <p:spPr>
-          <a:xfrm>
-            <a:off x="11002975" y="6355080"/>
-            <a:ext cx="731520" cy="320040"/>
-          </a:xfrm>
-          <a:prstGeom prst="rect">
-            <a:avLst/>
-          </a:prstGeom>
-          <a:noFill/>
-        </p:spPr>
-        <p:txBody>
-          <a:bodyPr wrap="square" anchor="t" lIns="0" rIns="0" tIns="0" bIns="0">
-            <a:spAutoFit/>
-          </a:bodyPr>
-          <a:lstStyle/>
-          <a:p>
-            <a:pPr algn="r"/>
-            <a:r>
-              <a:rPr sz="1100" b="0">
-                <a:solidFill>
-                  <a:srgbClr val="6B6258"/>
                 </a:solidFill>
                 <a:latin typeface="微软雅黑"/>
                 <a:ea typeface="微软雅黑"/>
@@ -6717,7 +6611,7 @@
                 <a:ea typeface="微软雅黑"/>
                 <a:cs typeface="微软雅黑"/>
               </a:rPr>
-              <a:t>易混易错</a:t>
+              <a:t>难点</a:t>
             </a:r>
           </a:p>
         </p:txBody>
@@ -6768,14 +6662,51 @@
       </p:sp>
       <p:sp>
         <p:nvSpPr>
-          <p:cNvPr id="5" name="Rounded Rectangle 4"/>
+          <p:cNvPr id="5" name="TextBox 4"/>
+          <p:cNvSpPr txBox="1"/>
+          <p:nvPr/>
+        </p:nvSpPr>
+        <p:spPr>
+          <a:xfrm>
+            <a:off x="640080" y="1280160"/>
+            <a:ext cx="10058400" cy="548640"/>
+          </a:xfrm>
+          <a:prstGeom prst="rect">
+            <a:avLst/>
+          </a:prstGeom>
+          <a:noFill/>
+        </p:spPr>
+        <p:txBody>
+          <a:bodyPr wrap="square" anchor="t" lIns="0" rIns="0" tIns="0" bIns="0">
+            <a:spAutoFit/>
+          </a:bodyPr>
+          <a:lstStyle/>
+          <a:p>
+            <a:pPr algn="l"/>
+            <a:r>
+              <a:rPr sz="2800" b="1">
+                <a:solidFill>
+                  <a:srgbClr val="1C2A33"/>
+                </a:solidFill>
+                <a:latin typeface="楷体"/>
+                <a:ea typeface="楷体"/>
+                <a:cs typeface="楷体"/>
+              </a:rPr>
+              <a:t>本课难点</a:t>
+            </a:r>
+          </a:p>
+        </p:txBody>
+      </p:sp>
+      <p:sp>
+        <p:nvSpPr>
+          <p:cNvPr id="6" name="Rounded Rectangle 5"/>
           <p:cNvSpPr/>
           <p:nvPr/>
         </p:nvSpPr>
         <p:spPr>
           <a:xfrm>
-            <a:off x="640080" y="1417320"/>
-            <a:ext cx="5349240" cy="2057400"/>
+            <a:off x="640080" y="2103120"/>
+            <a:ext cx="3393338" cy="4023360"/>
           </a:xfrm>
           <a:prstGeom prst="roundRect">
             <a:avLst/>
@@ -6814,14 +6745,14 @@
       </p:sp>
       <p:sp>
         <p:nvSpPr>
-          <p:cNvPr id="6" name="Oval 5"/>
+          <p:cNvPr id="7" name="Oval 6"/>
           <p:cNvSpPr/>
           <p:nvPr/>
         </p:nvSpPr>
         <p:spPr>
           <a:xfrm>
-            <a:off x="804672" y="1581912"/>
-            <a:ext cx="457200" cy="457200"/>
+            <a:off x="868680" y="2331720"/>
+            <a:ext cx="502920" cy="502920"/>
           </a:xfrm>
           <a:prstGeom prst="ellipse">
             <a:avLst/>
@@ -6858,14 +6789,14 @@
       </p:sp>
       <p:sp>
         <p:nvSpPr>
-          <p:cNvPr id="7" name="TextBox 6"/>
+          <p:cNvPr id="8" name="TextBox 7"/>
           <p:cNvSpPr txBox="1"/>
           <p:nvPr/>
         </p:nvSpPr>
         <p:spPr>
           <a:xfrm>
-            <a:off x="804672" y="1636776"/>
-            <a:ext cx="457200" cy="384048"/>
+            <a:off x="868680" y="2377440"/>
+            <a:ext cx="502920" cy="411480"/>
           </a:xfrm>
           <a:prstGeom prst="rect">
             <a:avLst/>
@@ -6880,7 +6811,7 @@
           <a:p>
             <a:pPr algn="ctr"/>
             <a:r>
-              <a:rPr sz="1600" b="1">
+              <a:rPr sz="1800" b="1">
                 <a:solidFill>
                   <a:srgbClr val="FFFFFF"/>
                 </a:solidFill>
@@ -6888,21 +6819,21 @@
                 <a:ea typeface="微软雅黑"/>
                 <a:cs typeface="微软雅黑"/>
               </a:rPr>
-              <a:t>!</a:t>
-            </a:r>
-          </a:p>
-        </p:txBody>
-      </p:sp>
-      <p:sp>
-        <p:nvSpPr>
-          <p:cNvPr id="8" name="TextBox 7"/>
+              <a:t>1</a:t>
+            </a:r>
+          </a:p>
+        </p:txBody>
+      </p:sp>
+      <p:sp>
+        <p:nvSpPr>
+          <p:cNvPr id="9" name="TextBox 8"/>
           <p:cNvSpPr txBox="1"/>
           <p:nvPr/>
         </p:nvSpPr>
         <p:spPr>
           <a:xfrm>
-            <a:off x="1371600" y="1527048"/>
-            <a:ext cx="4434840" cy="457200"/>
+            <a:off x="1508760" y="2331720"/>
+            <a:ext cx="2341778" cy="548640"/>
           </a:xfrm>
           <a:prstGeom prst="rect">
             <a:avLst/>
@@ -6915,54 +6846,9 @@
           </a:bodyPr>
           <a:lstStyle/>
           <a:p>
-            <a:pPr algn="l">
-              <a:lnSpc>
-                <a:spcPct val="110000"/>
-              </a:lnSpc>
-            </a:pPr>
-            <a:r>
-              <a:rPr sz="1600" b="1">
-                <a:solidFill>
-                  <a:srgbClr val="1C2A33"/>
-                </a:solidFill>
-                <a:latin typeface="微软雅黑"/>
-                <a:ea typeface="微软雅黑"/>
-                <a:cs typeface="微软雅黑"/>
-              </a:rPr>
-              <a:t/>
-            </a:r>
-          </a:p>
-        </p:txBody>
-      </p:sp>
-      <p:sp>
-        <p:nvSpPr>
-          <p:cNvPr id="9" name="TextBox 8"/>
-          <p:cNvSpPr txBox="1"/>
-          <p:nvPr/>
-        </p:nvSpPr>
-        <p:spPr>
-          <a:xfrm>
-            <a:off x="1371600" y="1965960"/>
-            <a:ext cx="4434840" cy="1417320"/>
-          </a:xfrm>
-          <a:prstGeom prst="rect">
-            <a:avLst/>
-          </a:prstGeom>
-          <a:noFill/>
-        </p:spPr>
-        <p:txBody>
-          <a:bodyPr wrap="square" anchor="t" lIns="0" rIns="0" tIns="0" bIns="0">
-            <a:spAutoFit/>
-          </a:bodyPr>
-          <a:lstStyle/>
-          <a:p>
-            <a:pPr algn="l">
-              <a:lnSpc>
-                <a:spcPct val="128000"/>
-              </a:lnSpc>
-            </a:pPr>
-            <a:r>
-              <a:rPr sz="1200" b="0">
+            <a:pPr algn="l"/>
+            <a:r>
+              <a:rPr sz="1550" b="1">
                 <a:solidFill>
                   <a:srgbClr val="1C2A33"/>
                 </a:solidFill>
@@ -6970,21 +6856,65 @@
                 <a:ea typeface="楷体"/>
                 <a:cs typeface="楷体"/>
               </a:rPr>
-              <a:t>① 产物价态。原因：同一Fe遇Cl2得+3、遇S/H+得+2，需依氧化剂强弱判断。</a:t>
-            </a:r>
-          </a:p>
-        </p:txBody>
-      </p:sp>
-      <p:sp>
-        <p:nvSpPr>
-          <p:cNvPr id="10" name="Rounded Rectangle 9"/>
+              <a:t>① 产物价态</a:t>
+            </a:r>
+          </a:p>
+        </p:txBody>
+      </p:sp>
+      <p:sp>
+        <p:nvSpPr>
+          <p:cNvPr id="10" name="TextBox 9"/>
+          <p:cNvSpPr txBox="1"/>
+          <p:nvPr/>
+        </p:nvSpPr>
+        <p:spPr>
+          <a:xfrm>
+            <a:off x="914400" y="3063240"/>
+            <a:ext cx="2844698" cy="2926080"/>
+          </a:xfrm>
+          <a:prstGeom prst="rect">
+            <a:avLst/>
+          </a:prstGeom>
+          <a:noFill/>
+        </p:spPr>
+        <p:txBody>
+          <a:bodyPr wrap="square" anchor="t" lIns="0" rIns="0" tIns="0" bIns="0">
+            <a:spAutoFit/>
+          </a:bodyPr>
+          <a:lstStyle/>
+          <a:p>
+            <a:pPr algn="l">
+              <a:lnSpc>
+                <a:spcPct val="150000"/>
+              </a:lnSpc>
+              <a:spcAft>
+                <a:spcPts val="600"/>
+              </a:spcAft>
+            </a:pPr>
+            <a:r>
+              <a:rPr sz="1350" b="0">
+                <a:solidFill>
+                  <a:srgbClr val="1C2A33"/>
+                </a:solidFill>
+                <a:latin typeface="楷体"/>
+                <a:ea typeface="楷体"/>
+                <a:cs typeface="楷体"/>
+              </a:rPr>
+              <a:t>原因：同一Fe遇Cl2得+3、遇S/H+得+2，需依氧化剂强弱判断。</a:t>
+            </a:r>
+          </a:p>
+        </p:txBody>
+      </p:sp>
+      <p:sp>
+        <p:nvSpPr>
+          <p:cNvPr id="11" name="Rounded Rectangle 10"/>
           <p:cNvSpPr/>
           <p:nvPr/>
         </p:nvSpPr>
         <p:spPr>
           <a:xfrm>
-            <a:off x="6263640" y="1417320"/>
-            <a:ext cx="5349240" cy="2057400"/>
+            <a:off x="4399178" y="2103120"/>
+            <a:ext cx="3393338" cy="4023360"/>
           </a:xfrm>
           <a:prstGeom prst="roundRect">
             <a:avLst/>
@@ -6994,7 +6924,7 @@
           </a:solidFill>
           <a:ln w="22860">
             <a:solidFill>
-              <a:srgbClr val="B23A2A"/>
+              <a:srgbClr val="2E7D6B"/>
             </a:solidFill>
           </a:ln>
           <a:effectLst/>
@@ -7023,20 +6953,20 @@
       </p:sp>
       <p:sp>
         <p:nvSpPr>
-          <p:cNvPr id="11" name="Oval 10"/>
+          <p:cNvPr id="12" name="Oval 11"/>
           <p:cNvSpPr/>
           <p:nvPr/>
         </p:nvSpPr>
         <p:spPr>
           <a:xfrm>
-            <a:off x="6428232" y="1581912"/>
-            <a:ext cx="457200" cy="457200"/>
+            <a:off x="4627778" y="2331720"/>
+            <a:ext cx="502920" cy="502920"/>
           </a:xfrm>
           <a:prstGeom prst="ellipse">
             <a:avLst/>
           </a:prstGeom>
           <a:solidFill>
-            <a:srgbClr val="B23A2A"/>
+            <a:srgbClr val="2E7D6B"/>
           </a:solidFill>
           <a:ln>
             <a:noFill/>
@@ -7067,14 +6997,14 @@
       </p:sp>
       <p:sp>
         <p:nvSpPr>
-          <p:cNvPr id="12" name="TextBox 11"/>
+          <p:cNvPr id="13" name="TextBox 12"/>
           <p:cNvSpPr txBox="1"/>
           <p:nvPr/>
         </p:nvSpPr>
         <p:spPr>
           <a:xfrm>
-            <a:off x="6428232" y="1636776"/>
-            <a:ext cx="457200" cy="384048"/>
+            <a:off x="4627778" y="2377440"/>
+            <a:ext cx="502920" cy="411480"/>
           </a:xfrm>
           <a:prstGeom prst="rect">
             <a:avLst/>
@@ -7089,7 +7019,7 @@
           <a:p>
             <a:pPr algn="ctr"/>
             <a:r>
-              <a:rPr sz="1600" b="1">
+              <a:rPr sz="1800" b="1">
                 <a:solidFill>
                   <a:srgbClr val="FFFFFF"/>
                 </a:solidFill>
@@ -7097,21 +7027,21 @@
                 <a:ea typeface="微软雅黑"/>
                 <a:cs typeface="微软雅黑"/>
               </a:rPr>
-              <a:t>!</a:t>
-            </a:r>
-          </a:p>
-        </p:txBody>
-      </p:sp>
-      <p:sp>
-        <p:nvSpPr>
-          <p:cNvPr id="13" name="TextBox 12"/>
+              <a:t>2</a:t>
+            </a:r>
+          </a:p>
+        </p:txBody>
+      </p:sp>
+      <p:sp>
+        <p:nvSpPr>
+          <p:cNvPr id="14" name="TextBox 13"/>
           <p:cNvSpPr txBox="1"/>
           <p:nvPr/>
         </p:nvSpPr>
         <p:spPr>
           <a:xfrm>
-            <a:off x="6995160" y="1527048"/>
-            <a:ext cx="4434840" cy="457200"/>
+            <a:off x="5267858" y="2331720"/>
+            <a:ext cx="2341778" cy="548640"/>
           </a:xfrm>
           <a:prstGeom prst="rect">
             <a:avLst/>
@@ -7124,54 +7054,9 @@
           </a:bodyPr>
           <a:lstStyle/>
           <a:p>
-            <a:pPr algn="l">
-              <a:lnSpc>
-                <a:spcPct val="110000"/>
-              </a:lnSpc>
-            </a:pPr>
-            <a:r>
-              <a:rPr sz="1600" b="1">
-                <a:solidFill>
-                  <a:srgbClr val="1C2A33"/>
-                </a:solidFill>
-                <a:latin typeface="微软雅黑"/>
-                <a:ea typeface="微软雅黑"/>
-                <a:cs typeface="微软雅黑"/>
-              </a:rPr>
-              <a:t/>
-            </a:r>
-          </a:p>
-        </p:txBody>
-      </p:sp>
-      <p:sp>
-        <p:nvSpPr>
-          <p:cNvPr id="14" name="TextBox 13"/>
-          <p:cNvSpPr txBox="1"/>
-          <p:nvPr/>
-        </p:nvSpPr>
-        <p:spPr>
-          <a:xfrm>
-            <a:off x="6995160" y="1965960"/>
-            <a:ext cx="4434840" cy="1417320"/>
-          </a:xfrm>
-          <a:prstGeom prst="rect">
-            <a:avLst/>
-          </a:prstGeom>
-          <a:noFill/>
-        </p:spPr>
-        <p:txBody>
-          <a:bodyPr wrap="square" anchor="t" lIns="0" rIns="0" tIns="0" bIns="0">
-            <a:spAutoFit/>
-          </a:bodyPr>
-          <a:lstStyle/>
-          <a:p>
-            <a:pPr algn="l">
-              <a:lnSpc>
-                <a:spcPct val="128000"/>
-              </a:lnSpc>
-            </a:pPr>
-            <a:r>
-              <a:rPr sz="1400" b="0">
+            <a:pPr algn="l"/>
+            <a:r>
+              <a:rPr sz="1550" b="1">
                 <a:solidFill>
                   <a:srgbClr val="1C2A33"/>
                 </a:solidFill>
@@ -7179,21 +7064,65 @@
                 <a:ea typeface="楷体"/>
                 <a:cs typeface="楷体"/>
               </a:rPr>
-              <a:t>② Fe3O4组成。原因：可看作FeO·Fe2O3，含+2+3，易误认纯+3。</a:t>
-            </a:r>
-          </a:p>
-        </p:txBody>
-      </p:sp>
-      <p:sp>
-        <p:nvSpPr>
-          <p:cNvPr id="15" name="Rounded Rectangle 14"/>
+              <a:t>② Fe3O4组成</a:t>
+            </a:r>
+          </a:p>
+        </p:txBody>
+      </p:sp>
+      <p:sp>
+        <p:nvSpPr>
+          <p:cNvPr id="15" name="TextBox 14"/>
+          <p:cNvSpPr txBox="1"/>
+          <p:nvPr/>
+        </p:nvSpPr>
+        <p:spPr>
+          <a:xfrm>
+            <a:off x="4673498" y="3063240"/>
+            <a:ext cx="2844698" cy="2926080"/>
+          </a:xfrm>
+          <a:prstGeom prst="rect">
+            <a:avLst/>
+          </a:prstGeom>
+          <a:noFill/>
+        </p:spPr>
+        <p:txBody>
+          <a:bodyPr wrap="square" anchor="t" lIns="0" rIns="0" tIns="0" bIns="0">
+            <a:spAutoFit/>
+          </a:bodyPr>
+          <a:lstStyle/>
+          <a:p>
+            <a:pPr algn="l">
+              <a:lnSpc>
+                <a:spcPct val="150000"/>
+              </a:lnSpc>
+              <a:spcAft>
+                <a:spcPts val="600"/>
+              </a:spcAft>
+            </a:pPr>
+            <a:r>
+              <a:rPr sz="1350" b="0">
+                <a:solidFill>
+                  <a:srgbClr val="1C2A33"/>
+                </a:solidFill>
+                <a:latin typeface="楷体"/>
+                <a:ea typeface="楷体"/>
+                <a:cs typeface="楷体"/>
+              </a:rPr>
+              <a:t>原因：可看作FeO·Fe2O3，含+2+3，易误认纯+3。</a:t>
+            </a:r>
+          </a:p>
+        </p:txBody>
+      </p:sp>
+      <p:sp>
+        <p:nvSpPr>
+          <p:cNvPr id="16" name="Rounded Rectangle 15"/>
           <p:cNvSpPr/>
           <p:nvPr/>
         </p:nvSpPr>
         <p:spPr>
           <a:xfrm>
-            <a:off x="640080" y="3703320"/>
-            <a:ext cx="5349240" cy="2057400"/>
+            <a:off x="8158276" y="2103120"/>
+            <a:ext cx="3393338" cy="4023360"/>
           </a:xfrm>
           <a:prstGeom prst="roundRect">
             <a:avLst/>
@@ -7203,7 +7132,7 @@
           </a:solidFill>
           <a:ln w="22860">
             <a:solidFill>
-              <a:srgbClr val="B23A2A"/>
+              <a:srgbClr val="C8A86B"/>
             </a:solidFill>
           </a:ln>
           <a:effectLst/>
@@ -7232,20 +7161,20 @@
       </p:sp>
       <p:sp>
         <p:nvSpPr>
-          <p:cNvPr id="16" name="Oval 15"/>
+          <p:cNvPr id="17" name="Oval 16"/>
           <p:cNvSpPr/>
           <p:nvPr/>
         </p:nvSpPr>
         <p:spPr>
           <a:xfrm>
-            <a:off x="804672" y="3867912"/>
-            <a:ext cx="457200" cy="457200"/>
+            <a:off x="8386876" y="2331720"/>
+            <a:ext cx="502920" cy="502920"/>
           </a:xfrm>
           <a:prstGeom prst="ellipse">
             <a:avLst/>
           </a:prstGeom>
           <a:solidFill>
-            <a:srgbClr val="B23A2A"/>
+            <a:srgbClr val="C8A86B"/>
           </a:solidFill>
           <a:ln>
             <a:noFill/>
@@ -7276,14 +7205,14 @@
       </p:sp>
       <p:sp>
         <p:nvSpPr>
-          <p:cNvPr id="17" name="TextBox 16"/>
+          <p:cNvPr id="18" name="TextBox 17"/>
           <p:cNvSpPr txBox="1"/>
           <p:nvPr/>
         </p:nvSpPr>
         <p:spPr>
           <a:xfrm>
-            <a:off x="804672" y="3922776"/>
-            <a:ext cx="457200" cy="384048"/>
+            <a:off x="8386876" y="2377440"/>
+            <a:ext cx="502920" cy="411480"/>
           </a:xfrm>
           <a:prstGeom prst="rect">
             <a:avLst/>
@@ -7298,7 +7227,7 @@
           <a:p>
             <a:pPr algn="ctr"/>
             <a:r>
-              <a:rPr sz="1600" b="1">
+              <a:rPr sz="1800" b="1">
                 <a:solidFill>
                   <a:srgbClr val="FFFFFF"/>
                 </a:solidFill>
@@ -7306,21 +7235,21 @@
                 <a:ea typeface="微软雅黑"/>
                 <a:cs typeface="微软雅黑"/>
               </a:rPr>
-              <a:t>!</a:t>
-            </a:r>
-          </a:p>
-        </p:txBody>
-      </p:sp>
-      <p:sp>
-        <p:nvSpPr>
-          <p:cNvPr id="18" name="TextBox 17"/>
+              <a:t>3</a:t>
+            </a:r>
+          </a:p>
+        </p:txBody>
+      </p:sp>
+      <p:sp>
+        <p:nvSpPr>
+          <p:cNvPr id="19" name="TextBox 18"/>
           <p:cNvSpPr txBox="1"/>
           <p:nvPr/>
         </p:nvSpPr>
         <p:spPr>
           <a:xfrm>
-            <a:off x="1371600" y="3813048"/>
-            <a:ext cx="4434840" cy="457200"/>
+            <a:off x="9026956" y="2331720"/>
+            <a:ext cx="2341778" cy="548640"/>
           </a:xfrm>
           <a:prstGeom prst="rect">
             <a:avLst/>
@@ -7333,54 +7262,9 @@
           </a:bodyPr>
           <a:lstStyle/>
           <a:p>
-            <a:pPr algn="l">
-              <a:lnSpc>
-                <a:spcPct val="110000"/>
-              </a:lnSpc>
-            </a:pPr>
-            <a:r>
-              <a:rPr sz="1600" b="1">
-                <a:solidFill>
-                  <a:srgbClr val="1C2A33"/>
-                </a:solidFill>
-                <a:latin typeface="微软雅黑"/>
-                <a:ea typeface="微软雅黑"/>
-                <a:cs typeface="微软雅黑"/>
-              </a:rPr>
-              <a:t/>
-            </a:r>
-          </a:p>
-        </p:txBody>
-      </p:sp>
-      <p:sp>
-        <p:nvSpPr>
-          <p:cNvPr id="19" name="TextBox 18"/>
-          <p:cNvSpPr txBox="1"/>
-          <p:nvPr/>
-        </p:nvSpPr>
-        <p:spPr>
-          <a:xfrm>
-            <a:off x="1371600" y="4251960"/>
-            <a:ext cx="4434840" cy="1417320"/>
-          </a:xfrm>
-          <a:prstGeom prst="rect">
-            <a:avLst/>
-          </a:prstGeom>
-          <a:noFill/>
-        </p:spPr>
-        <p:txBody>
-          <a:bodyPr wrap="square" anchor="t" lIns="0" rIns="0" tIns="0" bIns="0">
-            <a:spAutoFit/>
-          </a:bodyPr>
-          <a:lstStyle/>
-          <a:p>
-            <a:pPr algn="l">
-              <a:lnSpc>
-                <a:spcPct val="128000"/>
-              </a:lnSpc>
-            </a:pPr>
-            <a:r>
-              <a:rPr sz="1400" b="0">
+            <a:pPr algn="l"/>
+            <a:r>
+              <a:rPr sz="1550" b="1">
                 <a:solidFill>
                   <a:srgbClr val="1C2A33"/>
                 </a:solidFill>
@@ -7388,7 +7272,7 @@
                 <a:ea typeface="楷体"/>
                 <a:cs typeface="楷体"/>
               </a:rPr>
-              <a:t>③ 锈蚀。原因：电化学腐蚀原理后续，此处先现象。</a:t>
+              <a:t>③ 锈蚀</a:t>
             </a:r>
           </a:p>
         </p:txBody>
@@ -7396,6 +7280,50 @@
       <p:sp>
         <p:nvSpPr>
           <p:cNvPr id="20" name="TextBox 19"/>
+          <p:cNvSpPr txBox="1"/>
+          <p:nvPr/>
+        </p:nvSpPr>
+        <p:spPr>
+          <a:xfrm>
+            <a:off x="8432596" y="3063240"/>
+            <a:ext cx="2844698" cy="2926080"/>
+          </a:xfrm>
+          <a:prstGeom prst="rect">
+            <a:avLst/>
+          </a:prstGeom>
+          <a:noFill/>
+        </p:spPr>
+        <p:txBody>
+          <a:bodyPr wrap="square" anchor="t" lIns="0" rIns="0" tIns="0" bIns="0">
+            <a:spAutoFit/>
+          </a:bodyPr>
+          <a:lstStyle/>
+          <a:p>
+            <a:pPr algn="l">
+              <a:lnSpc>
+                <a:spcPct val="150000"/>
+              </a:lnSpc>
+              <a:spcAft>
+                <a:spcPts val="600"/>
+              </a:spcAft>
+            </a:pPr>
+            <a:r>
+              <a:rPr sz="1350" b="0">
+                <a:solidFill>
+                  <a:srgbClr val="1C2A33"/>
+                </a:solidFill>
+                <a:latin typeface="楷体"/>
+                <a:ea typeface="楷体"/>
+                <a:cs typeface="楷体"/>
+              </a:rPr>
+              <a:t>原因：电化学腐蚀原理后续，此处先现象。</a:t>
+            </a:r>
+          </a:p>
+        </p:txBody>
+      </p:sp>
+      <p:sp>
+        <p:nvSpPr>
+          <p:cNvPr id="21" name="TextBox 20"/>
           <p:cNvSpPr txBox="1"/>
           <p:nvPr/>
         </p:nvSpPr>
@@ -7522,13 +7450,13 @@
             <a:r>
               <a:rPr sz="1300" b="1">
                 <a:solidFill>
-                  <a:srgbClr val="C8A86B"/>
+                  <a:srgbClr val="B23A2A"/>
                 </a:solidFill>
                 <a:latin typeface="微软雅黑"/>
                 <a:ea typeface="微软雅黑"/>
                 <a:cs typeface="微软雅黑"/>
               </a:rPr>
-              <a:t>要点板书</a:t>
+              <a:t>板书精华</a:t>
             </a:r>
           </a:p>
         </p:txBody>
@@ -7548,7 +7476,7 @@
             <a:avLst/>
           </a:prstGeom>
           <a:solidFill>
-            <a:srgbClr val="C8A86B"/>
+            <a:srgbClr val="B23A2A"/>
           </a:solidFill>
           <a:ln>
             <a:noFill/>
@@ -7579,26 +7507,58 @@
       </p:sp>
       <p:sp>
         <p:nvSpPr>
-          <p:cNvPr id="5" name="Rounded Rectangle 4"/>
+          <p:cNvPr id="5" name="TextBox 4"/>
+          <p:cNvSpPr txBox="1"/>
+          <p:nvPr/>
+        </p:nvSpPr>
+        <p:spPr>
+          <a:xfrm>
+            <a:off x="640080" y="1280160"/>
+            <a:ext cx="10058400" cy="548640"/>
+          </a:xfrm>
+          <a:prstGeom prst="rect">
+            <a:avLst/>
+          </a:prstGeom>
+          <a:noFill/>
+        </p:spPr>
+        <p:txBody>
+          <a:bodyPr wrap="square" anchor="t" lIns="0" rIns="0" tIns="0" bIns="0">
+            <a:spAutoFit/>
+          </a:bodyPr>
+          <a:lstStyle/>
+          <a:p>
+            <a:pPr algn="l"/>
+            <a:r>
+              <a:rPr sz="2600" b="1">
+                <a:solidFill>
+                  <a:srgbClr val="1C2A33"/>
+                </a:solidFill>
+                <a:latin typeface="楷体"/>
+                <a:ea typeface="楷体"/>
+                <a:cs typeface="楷体"/>
+              </a:rPr>
+              <a:t>板书精华</a:t>
+            </a:r>
+          </a:p>
+        </p:txBody>
+      </p:sp>
+      <p:sp>
+        <p:nvSpPr>
+          <p:cNvPr id="6" name="Rounded Rectangle 5"/>
           <p:cNvSpPr/>
           <p:nvPr/>
         </p:nvSpPr>
         <p:spPr>
           <a:xfrm>
-            <a:off x="640080" y="1417320"/>
-            <a:ext cx="10911535" cy="5394960"/>
+            <a:off x="640080" y="2011680"/>
+            <a:ext cx="10911535" cy="4206240"/>
           </a:xfrm>
           <a:prstGeom prst="roundRect">
             <a:avLst/>
           </a:prstGeom>
           <a:solidFill>
-            <a:srgbClr val="FFFFFF"/>
+            <a:srgbClr val="1C2A33"/>
           </a:solidFill>
-          <a:ln w="25400">
-            <a:solidFill>
-              <a:srgbClr val="C8A86B"/>
-            </a:solidFill>
-          </a:ln>
           <a:effectLst/>
         </p:spPr>
         <p:style>
@@ -7625,14 +7585,14 @@
       </p:sp>
       <p:sp>
         <p:nvSpPr>
-          <p:cNvPr id="6" name="TextBox 5"/>
+          <p:cNvPr id="7" name="TextBox 6"/>
           <p:cNvSpPr txBox="1"/>
           <p:nvPr/>
         </p:nvSpPr>
         <p:spPr>
           <a:xfrm>
-            <a:off x="914400" y="1554480"/>
-            <a:ext cx="10362895" cy="5120640"/>
+            <a:off x="1005840" y="2240280"/>
+            <a:ext cx="10180015" cy="3749039"/>
           </a:xfrm>
           <a:prstGeom prst="rect">
             <a:avLst/>
@@ -7646,39 +7606,195 @@
           <a:lstStyle/>
           <a:p>
             <a:pPr algn="l">
+              <a:spcAft>
+                <a:spcPts val="1000"/>
+              </a:spcAft>
+            </a:pPr>
+            <a:r>
+              <a:rPr sz="1800" b="1">
+                <a:solidFill>
+                  <a:srgbClr val="C8A86B"/>
+                </a:solidFill>
+                <a:latin typeface="楷体"/>
+                <a:ea typeface="楷体"/>
+                <a:cs typeface="楷体"/>
+              </a:rPr>
+              <a:t>铁及其氧化物</a:t>
+            </a:r>
+          </a:p>
+          <a:p>
+            <a:pPr algn="l">
               <a:lnSpc>
-                <a:spcPct val="110000"/>
+                <a:spcPct val="150000"/>
               </a:lnSpc>
               <a:spcAft>
-                <a:spcPts val="100"/>
+                <a:spcPts val="600"/>
               </a:spcAft>
             </a:pPr>
             <a:r>
-              <a:rPr sz="1300" b="0">
-                <a:solidFill>
-                  <a:srgbClr val="1C2A33"/>
+              <a:rPr sz="1600" b="0">
+                <a:solidFill>
+                  <a:srgbClr val="FFFFFF"/>
                 </a:solidFill>
                 <a:latin typeface="微软雅黑"/>
                 <a:ea typeface="微软雅黑"/>
                 <a:cs typeface="微软雅黑"/>
               </a:rPr>
-              <a:t>┌── 铁及其氧化物 ──┐
-│ 3Fe+2O2=Fe3O4 │
-│ 2Fe+3Cl2= │
-│ 2FeCl3(+3) │
-│ Fe+2HCl= │
-│ FeCl2+H2↑(+2)│
-│ FeO黑 Fe2O3红│
-│ Fe3O4(黑磁性)│
-│ =FeO·Fe2O3 │
-└────────────────┘</a:t>
-            </a:r>
-          </a:p>
-        </p:txBody>
-      </p:sp>
-      <p:sp>
-        <p:nvSpPr>
-          <p:cNvPr id="7" name="TextBox 6"/>
+              <a:t>3Fe+2O2=Fe3O4</a:t>
+            </a:r>
+          </a:p>
+          <a:p>
+            <a:pPr algn="l">
+              <a:lnSpc>
+                <a:spcPct val="150000"/>
+              </a:lnSpc>
+              <a:spcAft>
+                <a:spcPts val="600"/>
+              </a:spcAft>
+            </a:pPr>
+            <a:r>
+              <a:rPr sz="1600" b="0">
+                <a:solidFill>
+                  <a:srgbClr val="FFFFFF"/>
+                </a:solidFill>
+                <a:latin typeface="微软雅黑"/>
+                <a:ea typeface="微软雅黑"/>
+                <a:cs typeface="微软雅黑"/>
+              </a:rPr>
+              <a:t>2Fe+3Cl2=</a:t>
+            </a:r>
+          </a:p>
+          <a:p>
+            <a:pPr algn="l">
+              <a:lnSpc>
+                <a:spcPct val="150000"/>
+              </a:lnSpc>
+              <a:spcAft>
+                <a:spcPts val="600"/>
+              </a:spcAft>
+            </a:pPr>
+            <a:r>
+              <a:rPr sz="1600" b="0">
+                <a:solidFill>
+                  <a:srgbClr val="FFFFFF"/>
+                </a:solidFill>
+                <a:latin typeface="微软雅黑"/>
+                <a:ea typeface="微软雅黑"/>
+                <a:cs typeface="微软雅黑"/>
+              </a:rPr>
+              <a:t>2FeCl3(+3)</a:t>
+            </a:r>
+          </a:p>
+          <a:p>
+            <a:pPr algn="l">
+              <a:lnSpc>
+                <a:spcPct val="150000"/>
+              </a:lnSpc>
+              <a:spcAft>
+                <a:spcPts val="600"/>
+              </a:spcAft>
+            </a:pPr>
+            <a:r>
+              <a:rPr sz="1600" b="0">
+                <a:solidFill>
+                  <a:srgbClr val="FFFFFF"/>
+                </a:solidFill>
+                <a:latin typeface="微软雅黑"/>
+                <a:ea typeface="微软雅黑"/>
+                <a:cs typeface="微软雅黑"/>
+              </a:rPr>
+              <a:t>Fe+2HCl=</a:t>
+            </a:r>
+          </a:p>
+          <a:p>
+            <a:pPr algn="l">
+              <a:lnSpc>
+                <a:spcPct val="150000"/>
+              </a:lnSpc>
+              <a:spcAft>
+                <a:spcPts val="600"/>
+              </a:spcAft>
+            </a:pPr>
+            <a:r>
+              <a:rPr sz="1600" b="0">
+                <a:solidFill>
+                  <a:srgbClr val="FFFFFF"/>
+                </a:solidFill>
+                <a:latin typeface="微软雅黑"/>
+                <a:ea typeface="微软雅黑"/>
+                <a:cs typeface="微软雅黑"/>
+              </a:rPr>
+              <a:t>FeCl2+H2↑(+2)</a:t>
+            </a:r>
+          </a:p>
+          <a:p>
+            <a:pPr algn="l">
+              <a:lnSpc>
+                <a:spcPct val="150000"/>
+              </a:lnSpc>
+              <a:spcAft>
+                <a:spcPts val="600"/>
+              </a:spcAft>
+            </a:pPr>
+            <a:r>
+              <a:rPr sz="1600" b="0">
+                <a:solidFill>
+                  <a:srgbClr val="FFFFFF"/>
+                </a:solidFill>
+                <a:latin typeface="微软雅黑"/>
+                <a:ea typeface="微软雅黑"/>
+                <a:cs typeface="微软雅黑"/>
+              </a:rPr>
+              <a:t>FeO黑 Fe2O3红</a:t>
+            </a:r>
+          </a:p>
+          <a:p>
+            <a:pPr algn="l">
+              <a:lnSpc>
+                <a:spcPct val="150000"/>
+              </a:lnSpc>
+              <a:spcAft>
+                <a:spcPts val="600"/>
+              </a:spcAft>
+            </a:pPr>
+            <a:r>
+              <a:rPr sz="1600" b="0">
+                <a:solidFill>
+                  <a:srgbClr val="FFFFFF"/>
+                </a:solidFill>
+                <a:latin typeface="微软雅黑"/>
+                <a:ea typeface="微软雅黑"/>
+                <a:cs typeface="微软雅黑"/>
+              </a:rPr>
+              <a:t>Fe3O4(黑磁性)</a:t>
+            </a:r>
+          </a:p>
+          <a:p>
+            <a:pPr algn="l">
+              <a:lnSpc>
+                <a:spcPct val="150000"/>
+              </a:lnSpc>
+              <a:spcAft>
+                <a:spcPts val="600"/>
+              </a:spcAft>
+            </a:pPr>
+            <a:r>
+              <a:rPr sz="1600" b="0">
+                <a:solidFill>
+                  <a:srgbClr val="FFFFFF"/>
+                </a:solidFill>
+                <a:latin typeface="微软雅黑"/>
+                <a:ea typeface="微软雅黑"/>
+                <a:cs typeface="微软雅黑"/>
+              </a:rPr>
+              <a:t>=FeO·Fe2O3</a:t>
+            </a:r>
+          </a:p>
+        </p:txBody>
+      </p:sp>
+      <p:sp>
+        <p:nvSpPr>
+          <p:cNvPr id="8" name="TextBox 7"/>
           <p:cNvSpPr txBox="1"/>
           <p:nvPr/>
         </p:nvSpPr>
@@ -7805,13 +7921,13 @@
             <a:r>
               <a:rPr sz="1300" b="1">
                 <a:solidFill>
-                  <a:srgbClr val="2E7D6B"/>
+                  <a:srgbClr val="B23A2A"/>
                 </a:solidFill>
                 <a:latin typeface="微软雅黑"/>
                 <a:ea typeface="微软雅黑"/>
                 <a:cs typeface="微软雅黑"/>
               </a:rPr>
-              <a:t>分层作业</a:t>
+              <a:t>作业</a:t>
             </a:r>
           </a:p>
         </p:txBody>
@@ -7831,7 +7947,7 @@
             <a:avLst/>
           </a:prstGeom>
           <a:solidFill>
-            <a:srgbClr val="2E7D6B"/>
+            <a:srgbClr val="B23A2A"/>
           </a:solidFill>
           <a:ln>
             <a:noFill/>
@@ -7862,14 +7978,219 @@
       </p:sp>
       <p:sp>
         <p:nvSpPr>
-          <p:cNvPr id="5" name="Rounded Rectangle 4"/>
+          <p:cNvPr id="5" name="TextBox 4"/>
+          <p:cNvSpPr txBox="1"/>
+          <p:nvPr/>
+        </p:nvSpPr>
+        <p:spPr>
+          <a:xfrm>
+            <a:off x="640080" y="1280160"/>
+            <a:ext cx="10058400" cy="548640"/>
+          </a:xfrm>
+          <a:prstGeom prst="rect">
+            <a:avLst/>
+          </a:prstGeom>
+          <a:noFill/>
+        </p:spPr>
+        <p:txBody>
+          <a:bodyPr wrap="square" anchor="t" lIns="0" rIns="0" tIns="0" bIns="0">
+            <a:spAutoFit/>
+          </a:bodyPr>
+          <a:lstStyle/>
+          <a:p>
+            <a:pPr algn="l"/>
+            <a:r>
+              <a:rPr sz="2600" b="1">
+                <a:solidFill>
+                  <a:srgbClr val="1C2A33"/>
+                </a:solidFill>
+                <a:latin typeface="楷体"/>
+                <a:ea typeface="楷体"/>
+                <a:cs typeface="楷体"/>
+              </a:rPr>
+              <a:t>基础 · 提升 · 拓展</a:t>
+            </a:r>
+          </a:p>
+        </p:txBody>
+      </p:sp>
+      <p:sp>
+        <p:nvSpPr>
+          <p:cNvPr id="6" name="Rounded Rectangle 5"/>
           <p:cNvSpPr/>
           <p:nvPr/>
         </p:nvSpPr>
         <p:spPr>
           <a:xfrm>
-            <a:off x="640080" y="1417320"/>
-            <a:ext cx="10911535" cy="1417320"/>
+            <a:off x="640080" y="2103120"/>
+            <a:ext cx="5272887" cy="3017520"/>
+          </a:xfrm>
+          <a:prstGeom prst="roundRect">
+            <a:avLst/>
+          </a:prstGeom>
+          <a:solidFill>
+            <a:srgbClr val="FFFFFF"/>
+          </a:solidFill>
+          <a:ln w="22860">
+            <a:solidFill>
+              <a:srgbClr val="B23A2A"/>
+            </a:solidFill>
+          </a:ln>
+          <a:effectLst/>
+        </p:spPr>
+        <p:style>
+          <a:lnRef idx="1">
+            <a:schemeClr val="accent1"/>
+          </a:lnRef>
+          <a:fillRef idx="3">
+            <a:schemeClr val="accent1"/>
+          </a:fillRef>
+          <a:effectRef idx="2">
+            <a:schemeClr val="accent1"/>
+          </a:effectRef>
+          <a:fontRef idx="minor">
+            <a:schemeClr val="lt1"/>
+          </a:fontRef>
+        </p:style>
+        <p:txBody>
+          <a:bodyPr rtlCol="0" anchor="ctr"/>
+          <a:lstStyle/>
+          <a:p>
+            <a:pPr algn="ctr"/>
+          </a:p>
+        </p:txBody>
+      </p:sp>
+      <p:sp>
+        <p:nvSpPr>
+          <p:cNvPr id="7" name="Rectangle 6"/>
+          <p:cNvSpPr/>
+          <p:nvPr/>
+        </p:nvSpPr>
+        <p:spPr>
+          <a:xfrm>
+            <a:off x="640080" y="2103120"/>
+            <a:ext cx="5272887" cy="502920"/>
+          </a:xfrm>
+          <a:prstGeom prst="rect">
+            <a:avLst/>
+          </a:prstGeom>
+          <a:solidFill>
+            <a:srgbClr val="B23A2A"/>
+          </a:solidFill>
+          <a:ln>
+            <a:noFill/>
+          </a:ln>
+          <a:effectLst/>
+        </p:spPr>
+        <p:style>
+          <a:lnRef idx="1">
+            <a:schemeClr val="accent1"/>
+          </a:lnRef>
+          <a:fillRef idx="3">
+            <a:schemeClr val="accent1"/>
+          </a:fillRef>
+          <a:effectRef idx="2">
+            <a:schemeClr val="accent1"/>
+          </a:effectRef>
+          <a:fontRef idx="minor">
+            <a:schemeClr val="lt1"/>
+          </a:fontRef>
+        </p:style>
+        <p:txBody>
+          <a:bodyPr rtlCol="0" anchor="ctr"/>
+          <a:lstStyle/>
+          <a:p>
+            <a:pPr algn="ctr"/>
+          </a:p>
+        </p:txBody>
+      </p:sp>
+      <p:sp>
+        <p:nvSpPr>
+          <p:cNvPr id="8" name="TextBox 7"/>
+          <p:cNvSpPr txBox="1"/>
+          <p:nvPr/>
+        </p:nvSpPr>
+        <p:spPr>
+          <a:xfrm>
+            <a:off x="640080" y="2194560"/>
+            <a:ext cx="5272887" cy="365760"/>
+          </a:xfrm>
+          <a:prstGeom prst="rect">
+            <a:avLst/>
+          </a:prstGeom>
+          <a:noFill/>
+        </p:spPr>
+        <p:txBody>
+          <a:bodyPr wrap="square" anchor="t" lIns="0" rIns="0" tIns="0" bIns="0">
+            <a:spAutoFit/>
+          </a:bodyPr>
+          <a:lstStyle/>
+          <a:p>
+            <a:pPr algn="ctr"/>
+            <a:r>
+              <a:rPr sz="1500" b="1">
+                <a:solidFill>
+                  <a:srgbClr val="FFFFFF"/>
+                </a:solidFill>
+                <a:latin typeface="微软雅黑"/>
+                <a:ea typeface="微软雅黑"/>
+                <a:cs typeface="微软雅黑"/>
+              </a:rPr>
+              <a:t>基础 · 必做</a:t>
+            </a:r>
+          </a:p>
+        </p:txBody>
+      </p:sp>
+      <p:sp>
+        <p:nvSpPr>
+          <p:cNvPr id="9" name="TextBox 8"/>
+          <p:cNvSpPr txBox="1"/>
+          <p:nvPr/>
+        </p:nvSpPr>
+        <p:spPr>
+          <a:xfrm>
+            <a:off x="914400" y="2834640"/>
+            <a:ext cx="4724247" cy="2103120"/>
+          </a:xfrm>
+          <a:prstGeom prst="rect">
+            <a:avLst/>
+          </a:prstGeom>
+          <a:noFill/>
+        </p:spPr>
+        <p:txBody>
+          <a:bodyPr wrap="square" anchor="t" lIns="0" rIns="0" tIns="0" bIns="0">
+            <a:spAutoFit/>
+          </a:bodyPr>
+          <a:lstStyle/>
+          <a:p>
+            <a:pPr algn="l">
+              <a:lnSpc>
+                <a:spcPct val="150000"/>
+              </a:lnSpc>
+            </a:pPr>
+            <a:r>
+              <a:rPr sz="1350" b="0">
+                <a:solidFill>
+                  <a:srgbClr val="1C2A33"/>
+                </a:solidFill>
+                <a:latin typeface="楷体"/>
+                <a:ea typeface="楷体"/>
+                <a:cs typeface="楷体"/>
+              </a:rPr>
+              <a:t>1. 写出Fe在Cl2中燃烧、与稀盐酸反应的化学方程式。2. Fe3O4中铁元素的化合价如何？</a:t>
+            </a:r>
+          </a:p>
+        </p:txBody>
+      </p:sp>
+      <p:sp>
+        <p:nvSpPr>
+          <p:cNvPr id="10" name="Rounded Rectangle 9"/>
+          <p:cNvSpPr/>
+          <p:nvPr/>
+        </p:nvSpPr>
+        <p:spPr>
+          <a:xfrm>
+            <a:off x="6278727" y="2103120"/>
+            <a:ext cx="5272887" cy="3017520"/>
           </a:xfrm>
           <a:prstGeom prst="roundRect">
             <a:avLst/>
@@ -7908,107 +8229,23 @@
       </p:sp>
       <p:sp>
         <p:nvSpPr>
-          <p:cNvPr id="6" name="TextBox 5"/>
-          <p:cNvSpPr txBox="1"/>
-          <p:nvPr/>
-        </p:nvSpPr>
-        <p:spPr>
-          <a:xfrm>
-            <a:off x="1371600" y="1527048"/>
-            <a:ext cx="9997135" cy="457200"/>
-          </a:xfrm>
-          <a:prstGeom prst="rect">
-            <a:avLst/>
-          </a:prstGeom>
-          <a:noFill/>
-        </p:spPr>
-        <p:txBody>
-          <a:bodyPr wrap="square" anchor="t" lIns="0" rIns="0" tIns="0" bIns="0">
-            <a:spAutoFit/>
-          </a:bodyPr>
-          <a:lstStyle/>
-          <a:p>
-            <a:pPr algn="l">
-              <a:lnSpc>
-                <a:spcPct val="110000"/>
-              </a:lnSpc>
-            </a:pPr>
-            <a:r>
-              <a:rPr sz="1600" b="1">
-                <a:solidFill>
-                  <a:srgbClr val="1C2A33"/>
-                </a:solidFill>
-                <a:latin typeface="微软雅黑"/>
-                <a:ea typeface="微软雅黑"/>
-                <a:cs typeface="微软雅黑"/>
-              </a:rPr>
-              <a:t/>
-            </a:r>
-          </a:p>
-        </p:txBody>
-      </p:sp>
-      <p:sp>
-        <p:nvSpPr>
-          <p:cNvPr id="7" name="TextBox 6"/>
-          <p:cNvSpPr txBox="1"/>
-          <p:nvPr/>
-        </p:nvSpPr>
-        <p:spPr>
-          <a:xfrm>
-            <a:off x="1371600" y="1965960"/>
-            <a:ext cx="9997135" cy="777240"/>
-          </a:xfrm>
-          <a:prstGeom prst="rect">
-            <a:avLst/>
-          </a:prstGeom>
-          <a:noFill/>
-        </p:spPr>
-        <p:txBody>
-          <a:bodyPr wrap="square" anchor="t" lIns="0" rIns="0" tIns="0" bIns="0">
-            <a:spAutoFit/>
-          </a:bodyPr>
-          <a:lstStyle/>
-          <a:p>
-            <a:pPr algn="l">
-              <a:lnSpc>
-                <a:spcPct val="128000"/>
-              </a:lnSpc>
-            </a:pPr>
-            <a:r>
-              <a:rPr sz="1200" b="0">
-                <a:solidFill>
-                  <a:srgbClr val="1C2A33"/>
-                </a:solidFill>
-                <a:latin typeface="楷体"/>
-                <a:ea typeface="楷体"/>
-                <a:cs typeface="楷体"/>
-              </a:rPr>
-              <a:t>【基础作业】1. 写出Fe在Cl2中燃烧、与稀盐酸反应的化学方程式。2. Fe3O4中铁元素的化合价如何？</a:t>
-            </a:r>
-          </a:p>
-        </p:txBody>
-      </p:sp>
-      <p:sp>
-        <p:nvSpPr>
-          <p:cNvPr id="8" name="Rounded Rectangle 7"/>
+          <p:cNvPr id="11" name="Rectangle 10"/>
           <p:cNvSpPr/>
           <p:nvPr/>
         </p:nvSpPr>
         <p:spPr>
           <a:xfrm>
-            <a:off x="640080" y="2971800"/>
-            <a:ext cx="10911535" cy="1417320"/>
-          </a:xfrm>
-          <a:prstGeom prst="roundRect">
+            <a:off x="6278727" y="2103120"/>
+            <a:ext cx="5272887" cy="502920"/>
+          </a:xfrm>
+          <a:prstGeom prst="rect">
             <a:avLst/>
           </a:prstGeom>
           <a:solidFill>
-            <a:srgbClr val="FFFFFF"/>
+            <a:srgbClr val="2E7D6B"/>
           </a:solidFill>
-          <a:ln w="22860">
-            <a:solidFill>
-              <a:srgbClr val="2E7D6B"/>
-            </a:solidFill>
+          <a:ln>
+            <a:noFill/>
           </a:ln>
           <a:effectLst/>
         </p:spPr>
@@ -8036,14 +8273,14 @@
       </p:sp>
       <p:sp>
         <p:nvSpPr>
-          <p:cNvPr id="9" name="TextBox 8"/>
+          <p:cNvPr id="12" name="TextBox 11"/>
           <p:cNvSpPr txBox="1"/>
           <p:nvPr/>
         </p:nvSpPr>
         <p:spPr>
           <a:xfrm>
-            <a:off x="1371600" y="3081528"/>
-            <a:ext cx="9997135" cy="457200"/>
+            <a:off x="6278727" y="2194560"/>
+            <a:ext cx="5272887" cy="365760"/>
           </a:xfrm>
           <a:prstGeom prst="rect">
             <a:avLst/>
@@ -8056,35 +8293,31 @@
           </a:bodyPr>
           <a:lstStyle/>
           <a:p>
-            <a:pPr algn="l">
-              <a:lnSpc>
-                <a:spcPct val="110000"/>
-              </a:lnSpc>
-            </a:pPr>
-            <a:r>
-              <a:rPr sz="1600" b="1">
-                <a:solidFill>
-                  <a:srgbClr val="1C2A33"/>
+            <a:pPr algn="ctr"/>
+            <a:r>
+              <a:rPr sz="1500" b="1">
+                <a:solidFill>
+                  <a:srgbClr val="FFFFFF"/>
                 </a:solidFill>
                 <a:latin typeface="微软雅黑"/>
                 <a:ea typeface="微软雅黑"/>
                 <a:cs typeface="微软雅黑"/>
               </a:rPr>
-              <a:t/>
-            </a:r>
-          </a:p>
-        </p:txBody>
-      </p:sp>
-      <p:sp>
-        <p:nvSpPr>
-          <p:cNvPr id="10" name="TextBox 9"/>
+              <a:t>提升 · 选做</a:t>
+            </a:r>
+          </a:p>
+        </p:txBody>
+      </p:sp>
+      <p:sp>
+        <p:nvSpPr>
+          <p:cNvPr id="13" name="TextBox 12"/>
           <p:cNvSpPr txBox="1"/>
           <p:nvPr/>
         </p:nvSpPr>
         <p:spPr>
           <a:xfrm>
-            <a:off x="1371600" y="3520440"/>
-            <a:ext cx="9997135" cy="777240"/>
+            <a:off x="6553047" y="2834640"/>
+            <a:ext cx="4724247" cy="2103120"/>
           </a:xfrm>
           <a:prstGeom prst="rect">
             <a:avLst/>
@@ -8099,11 +8332,11 @@
           <a:p>
             <a:pPr algn="l">
               <a:lnSpc>
-                <a:spcPct val="128000"/>
+                <a:spcPct val="150000"/>
               </a:lnSpc>
             </a:pPr>
             <a:r>
-              <a:rPr sz="1400" b="0">
+              <a:rPr sz="1350" b="0">
                 <a:solidFill>
                   <a:srgbClr val="1C2A33"/>
                 </a:solidFill>
@@ -8111,14 +8344,96 @@
                 <a:ea typeface="楷体"/>
                 <a:cs typeface="楷体"/>
               </a:rPr>
-              <a:t>【提高作业】为什么Fe与盐酸反应得到FeCl2而不是FeCl3？</a:t>
-            </a:r>
-          </a:p>
-        </p:txBody>
-      </p:sp>
-      <p:sp>
-        <p:nvSpPr>
-          <p:cNvPr id="11" name="TextBox 10"/>
+              <a:t>为什么Fe与盐酸反应得到FeCl2而不是FeCl3？</a:t>
+            </a:r>
+          </a:p>
+        </p:txBody>
+      </p:sp>
+      <p:sp>
+        <p:nvSpPr>
+          <p:cNvPr id="14" name="Rounded Rectangle 13"/>
+          <p:cNvSpPr/>
+          <p:nvPr/>
+        </p:nvSpPr>
+        <p:spPr>
+          <a:xfrm>
+            <a:off x="640080" y="5349240"/>
+            <a:ext cx="10911535" cy="960120"/>
+          </a:xfrm>
+          <a:prstGeom prst="roundRect">
+            <a:avLst/>
+          </a:prstGeom>
+          <a:solidFill>
+            <a:srgbClr val="1C2A33"/>
+          </a:solidFill>
+          <a:effectLst/>
+        </p:spPr>
+        <p:style>
+          <a:lnRef idx="1">
+            <a:schemeClr val="accent1"/>
+          </a:lnRef>
+          <a:fillRef idx="3">
+            <a:schemeClr val="accent1"/>
+          </a:fillRef>
+          <a:effectRef idx="2">
+            <a:schemeClr val="accent1"/>
+          </a:effectRef>
+          <a:fontRef idx="minor">
+            <a:schemeClr val="lt1"/>
+          </a:fontRef>
+        </p:style>
+        <p:txBody>
+          <a:bodyPr rtlCol="0" anchor="ctr"/>
+          <a:lstStyle/>
+          <a:p>
+            <a:pPr algn="ctr"/>
+          </a:p>
+        </p:txBody>
+      </p:sp>
+      <p:sp>
+        <p:nvSpPr>
+          <p:cNvPr id="15" name="TextBox 14"/>
+          <p:cNvSpPr txBox="1"/>
+          <p:nvPr/>
+        </p:nvSpPr>
+        <p:spPr>
+          <a:xfrm>
+            <a:off x="914400" y="5458968"/>
+            <a:ext cx="10362895" cy="777240"/>
+          </a:xfrm>
+          <a:prstGeom prst="rect">
+            <a:avLst/>
+          </a:prstGeom>
+          <a:noFill/>
+        </p:spPr>
+        <p:txBody>
+          <a:bodyPr wrap="square" anchor="t" lIns="0" rIns="0" tIns="0" bIns="0">
+            <a:spAutoFit/>
+          </a:bodyPr>
+          <a:lstStyle/>
+          <a:p>
+            <a:pPr algn="l">
+              <a:lnSpc>
+                <a:spcPct val="140000"/>
+              </a:lnSpc>
+            </a:pPr>
+            <a:r>
+              <a:rPr sz="1350" b="0">
+                <a:solidFill>
+                  <a:srgbClr val="FFFFFF"/>
+                </a:solidFill>
+                <a:latin typeface="楷体"/>
+                <a:ea typeface="楷体"/>
+                <a:cs typeface="楷体"/>
+              </a:rPr>
+              <a:t>拓展衔接：下节课铁的氢氧化物与Fe2+/Fe3+转化。</a:t>
+            </a:r>
+          </a:p>
+        </p:txBody>
+      </p:sp>
+      <p:sp>
+        <p:nvSpPr>
+          <p:cNvPr id="16" name="TextBox 15"/>
           <p:cNvSpPr txBox="1"/>
           <p:nvPr/>
         </p:nvSpPr>
@@ -8245,13 +8560,13 @@
             <a:r>
               <a:rPr sz="1300" b="1">
                 <a:solidFill>
-                  <a:srgbClr val="C8A86B"/>
+                  <a:srgbClr val="B23A2A"/>
                 </a:solidFill>
                 <a:latin typeface="微软雅黑"/>
                 <a:ea typeface="微软雅黑"/>
                 <a:cs typeface="微软雅黑"/>
               </a:rPr>
-              <a:t>本课小结</a:t>
+              <a:t>单元小结</a:t>
             </a:r>
           </a:p>
         </p:txBody>
@@ -8271,7 +8586,7 @@
             <a:avLst/>
           </a:prstGeom>
           <a:solidFill>
-            <a:srgbClr val="C8A86B"/>
+            <a:srgbClr val="B23A2A"/>
           </a:solidFill>
           <a:ln>
             <a:noFill/>
@@ -8302,24 +8617,181 @@
       </p:sp>
       <p:sp>
         <p:nvSpPr>
-          <p:cNvPr id="5" name="Rectangle 4"/>
+          <p:cNvPr id="5" name="TextBox 4"/>
+          <p:cNvSpPr txBox="1"/>
+          <p:nvPr/>
+        </p:nvSpPr>
+        <p:spPr>
+          <a:xfrm>
+            <a:off x="640080" y="1280160"/>
+            <a:ext cx="10058400" cy="548640"/>
+          </a:xfrm>
+          <a:prstGeom prst="rect">
+            <a:avLst/>
+          </a:prstGeom>
+          <a:noFill/>
+        </p:spPr>
+        <p:txBody>
+          <a:bodyPr wrap="square" anchor="t" lIns="0" rIns="0" tIns="0" bIns="0">
+            <a:spAutoFit/>
+          </a:bodyPr>
+          <a:lstStyle/>
+          <a:p>
+            <a:pPr algn="l"/>
+            <a:r>
+              <a:rPr sz="2400" b="1">
+                <a:solidFill>
+                  <a:srgbClr val="1C2A33"/>
+                </a:solidFill>
+                <a:latin typeface="楷体"/>
+                <a:ea typeface="楷体"/>
+                <a:cs typeface="楷体"/>
+              </a:rPr>
+              <a:t>第3单元 · 铁 金属材料</a:t>
+            </a:r>
+          </a:p>
+        </p:txBody>
+      </p:sp>
+      <p:sp>
+        <p:nvSpPr>
+          <p:cNvPr id="6" name="TextBox 5"/>
+          <p:cNvSpPr txBox="1"/>
+          <p:nvPr/>
+        </p:nvSpPr>
+        <p:spPr>
+          <a:xfrm>
+            <a:off x="640080" y="2011680"/>
+            <a:ext cx="5227167" cy="457200"/>
+          </a:xfrm>
+          <a:prstGeom prst="rect">
+            <a:avLst/>
+          </a:prstGeom>
+          <a:noFill/>
+        </p:spPr>
+        <p:txBody>
+          <a:bodyPr wrap="square" anchor="t" lIns="0" rIns="0" tIns="0" bIns="0">
+            <a:spAutoFit/>
+          </a:bodyPr>
+          <a:lstStyle/>
+          <a:p>
+            <a:pPr algn="l"/>
+            <a:r>
+              <a:rPr sz="1700" b="1">
+                <a:solidFill>
+                  <a:srgbClr val="B23A2A"/>
+                </a:solidFill>
+                <a:latin typeface="楷体"/>
+                <a:ea typeface="楷体"/>
+                <a:cs typeface="楷体"/>
+              </a:rPr>
+              <a:t>本课要点回顾</a:t>
+            </a:r>
+          </a:p>
+        </p:txBody>
+      </p:sp>
+      <p:sp>
+        <p:nvSpPr>
+          <p:cNvPr id="7" name="TextBox 6"/>
+          <p:cNvSpPr txBox="1"/>
+          <p:nvPr/>
+        </p:nvSpPr>
+        <p:spPr>
+          <a:xfrm>
+            <a:off x="640080" y="2514599"/>
+            <a:ext cx="5227167" cy="3657600"/>
+          </a:xfrm>
+          <a:prstGeom prst="rect">
+            <a:avLst/>
+          </a:prstGeom>
+          <a:noFill/>
+        </p:spPr>
+        <p:txBody>
+          <a:bodyPr wrap="square" anchor="t" lIns="0" rIns="0" tIns="0" bIns="0">
+            <a:spAutoFit/>
+          </a:bodyPr>
+          <a:lstStyle/>
+          <a:p>
+            <a:pPr algn="l">
+              <a:lnSpc>
+                <a:spcPct val="145000"/>
+              </a:lnSpc>
+              <a:spcAft>
+                <a:spcPts val="1000"/>
+              </a:spcAft>
+            </a:pPr>
+            <a:r>
+              <a:rPr sz="1350" b="0">
+                <a:solidFill>
+                  <a:srgbClr val="1C2A33"/>
+                </a:solidFill>
+                <a:latin typeface="楷体"/>
+                <a:ea typeface="楷体"/>
+                <a:cs typeface="楷体"/>
+              </a:rPr>
+              <a:t>· ① Fe物性：银白、良导、延展。</a:t>
+            </a:r>
+          </a:p>
+          <a:p>
+            <a:pPr algn="l">
+              <a:lnSpc>
+                <a:spcPct val="145000"/>
+              </a:lnSpc>
+              <a:spcAft>
+                <a:spcPts val="1000"/>
+              </a:spcAft>
+            </a:pPr>
+            <a:r>
+              <a:rPr sz="1350" b="0">
+                <a:solidFill>
+                  <a:srgbClr val="1C2A33"/>
+                </a:solidFill>
+                <a:latin typeface="楷体"/>
+                <a:ea typeface="楷体"/>
+                <a:cs typeface="楷体"/>
+              </a:rPr>
+              <a:t>· ② 与O2：3Fe+2O2=Fe3O4(黑,有磁性)；常温潮湿生锈(Fe2O3·xH2O)。</a:t>
+            </a:r>
+          </a:p>
+          <a:p>
+            <a:pPr algn="l">
+              <a:lnSpc>
+                <a:spcPct val="145000"/>
+              </a:lnSpc>
+              <a:spcAft>
+                <a:spcPts val="1000"/>
+              </a:spcAft>
+            </a:pPr>
+            <a:r>
+              <a:rPr sz="1350" b="0">
+                <a:solidFill>
+                  <a:srgbClr val="1C2A33"/>
+                </a:solidFill>
+                <a:latin typeface="楷体"/>
+                <a:ea typeface="楷体"/>
+                <a:cs typeface="楷体"/>
+              </a:rPr>
+              <a:t>· ③ 与强氧化剂：2Fe+3Cl2=2FeCl3；与弱氧化剂：Fe+S=FeS(Fe+2)。</a:t>
+            </a:r>
+          </a:p>
+        </p:txBody>
+      </p:sp>
+      <p:sp>
+        <p:nvSpPr>
+          <p:cNvPr id="8" name="Rounded Rectangle 7"/>
           <p:cNvSpPr/>
           <p:nvPr/>
         </p:nvSpPr>
         <p:spPr>
           <a:xfrm>
-            <a:off x="640080" y="1737360"/>
-            <a:ext cx="54864" cy="431800"/>
-          </a:xfrm>
-          <a:prstGeom prst="rect">
+            <a:off x="6324447" y="2011680"/>
+            <a:ext cx="5227167" cy="4114800"/>
+          </a:xfrm>
+          <a:prstGeom prst="roundRect">
             <a:avLst/>
           </a:prstGeom>
           <a:solidFill>
-            <a:srgbClr val="C8A86B"/>
+            <a:srgbClr val="1C2A33"/>
           </a:solidFill>
-          <a:ln>
-            <a:noFill/>
-          </a:ln>
           <a:effectLst/>
         </p:spPr>
         <p:style>
@@ -8346,14 +8818,14 @@
       </p:sp>
       <p:sp>
         <p:nvSpPr>
-          <p:cNvPr id="6" name="TextBox 5"/>
+          <p:cNvPr id="9" name="TextBox 8"/>
           <p:cNvSpPr txBox="1"/>
           <p:nvPr/>
         </p:nvSpPr>
         <p:spPr>
           <a:xfrm>
-            <a:off x="868680" y="1645920"/>
-            <a:ext cx="10682935" cy="2194560"/>
+            <a:off x="6598767" y="2194560"/>
+            <a:ext cx="4678527" cy="3749039"/>
           </a:xfrm>
           <a:prstGeom prst="rect">
             <a:avLst/>
@@ -8365,46 +8837,104 @@
             <a:spAutoFit/>
           </a:bodyPr>
           <a:lstStyle/>
+          <a:p>
+            <a:pPr algn="l">
+              <a:spcAft>
+                <a:spcPts val="800"/>
+              </a:spcAft>
+            </a:pPr>
+            <a:r>
+              <a:rPr sz="1600" b="1">
+                <a:solidFill>
+                  <a:srgbClr val="C8A86B"/>
+                </a:solidFill>
+                <a:latin typeface="楷体"/>
+                <a:ea typeface="楷体"/>
+                <a:cs typeface="楷体"/>
+              </a:rPr>
+              <a:t>单元主线</a:t>
+            </a:r>
+          </a:p>
+          <a:p>
+            <a:pPr algn="l">
+              <a:spcAft>
+                <a:spcPts val="800"/>
+              </a:spcAft>
+            </a:pPr>
+            <a:r>
+              <a:rPr sz="1500" b="1">
+                <a:solidFill>
+                  <a:srgbClr val="FFFFFF"/>
+                </a:solidFill>
+                <a:latin typeface="楷体"/>
+                <a:ea typeface="楷体"/>
+                <a:cs typeface="楷体"/>
+              </a:rPr>
+              <a:t>铁 金属材料</a:t>
+            </a:r>
+          </a:p>
           <a:p>
             <a:pPr algn="l">
               <a:lnSpc>
                 <a:spcPct val="150000"/>
               </a:lnSpc>
               <a:spcAft>
-                <a:spcPts val="1000"/>
+                <a:spcPts val="800"/>
               </a:spcAft>
             </a:pPr>
             <a:r>
-              <a:rPr sz="2200" b="0">
-                <a:solidFill>
-                  <a:srgbClr val="1C2A33"/>
+              <a:rPr sz="1300" b="0">
+                <a:solidFill>
+                  <a:srgbClr val="E7DFD2"/>
                 </a:solidFill>
                 <a:latin typeface="楷体"/>
                 <a:ea typeface="楷体"/>
                 <a:cs typeface="楷体"/>
               </a:rPr>
-              <a:t>本单元主题：铁 金属材料。把今天学到的方法带进下一篇——自己读、自己想、自己写。</a:t>
-            </a:r>
-          </a:p>
-          <a:p>
-            <a:pPr algn="l"/>
-            <a:r>
-              <a:rPr sz="1600" b="1">
-                <a:solidFill>
-                  <a:srgbClr val="B23A2A"/>
-                </a:solidFill>
-                <a:latin typeface="微软雅黑"/>
-                <a:ea typeface="微软雅黑"/>
-                <a:cs typeface="微软雅黑"/>
+              <a:t>本课为第1课时，是单元知识链的一环。</a:t>
+            </a:r>
+          </a:p>
+          <a:p>
+            <a:pPr algn="l">
+              <a:spcAft>
+                <a:spcPts val="600"/>
+              </a:spcAft>
+            </a:pPr>
+            <a:r>
+              <a:rPr sz="1500" b="1">
+                <a:solidFill>
+                  <a:srgbClr val="C8A86B"/>
+                </a:solidFill>
+                <a:latin typeface="楷体"/>
+                <a:ea typeface="楷体"/>
+                <a:cs typeface="楷体"/>
               </a:rPr>
-              <a:t>方法迁移：圈关键信息 → 理事件脉络 → 析人物精神</a:t>
-            </a:r>
-          </a:p>
-        </p:txBody>
-      </p:sp>
-      <p:sp>
-        <p:nvSpPr>
-          <p:cNvPr id="7" name="TextBox 6"/>
+              <a:t>拓展衔接</a:t>
+            </a:r>
+          </a:p>
+          <a:p>
+            <a:pPr algn="l">
+              <a:lnSpc>
+                <a:spcPct val="150000"/>
+              </a:lnSpc>
+            </a:pPr>
+            <a:r>
+              <a:rPr sz="1300" b="0">
+                <a:solidFill>
+                  <a:srgbClr val="FFFFFF"/>
+                </a:solidFill>
+                <a:latin typeface="楷体"/>
+                <a:ea typeface="楷体"/>
+                <a:cs typeface="楷体"/>
+              </a:rPr>
+              <a:t>下节课铁的氢氧化物与Fe2+/Fe3+转化。</a:t>
+            </a:r>
+          </a:p>
+        </p:txBody>
+      </p:sp>
+      <p:sp>
+        <p:nvSpPr>
+          <p:cNvPr id="10" name="TextBox 9"/>
           <p:cNvSpPr txBox="1"/>
           <p:nvPr/>
         </p:nvSpPr>
